--- a/信實的神.pptx
+++ b/信實的神.pptx
@@ -10,6 +10,22 @@
     <p:sldId id="261" r:id="rId4"/>
     <p:sldId id="262" r:id="rId5"/>
     <p:sldId id="263" r:id="rId6"/>
+    <p:sldId id="264" r:id="rId7"/>
+    <p:sldId id="265" r:id="rId8"/>
+    <p:sldId id="266" r:id="rId9"/>
+    <p:sldId id="267" r:id="rId10"/>
+    <p:sldId id="268" r:id="rId11"/>
+    <p:sldId id="269" r:id="rId12"/>
+    <p:sldId id="270" r:id="rId13"/>
+    <p:sldId id="271" r:id="rId14"/>
+    <p:sldId id="272" r:id="rId15"/>
+    <p:sldId id="273" r:id="rId16"/>
+    <p:sldId id="274" r:id="rId17"/>
+    <p:sldId id="275" r:id="rId18"/>
+    <p:sldId id="276" r:id="rId19"/>
+    <p:sldId id="277" r:id="rId20"/>
+    <p:sldId id="278" r:id="rId21"/>
+    <p:sldId id="279" r:id="rId22"/>
   </p:sldIdLst>
   <p:sldSz cx="12192000" cy="6858000"/>
   <p:notesSz cx="6858000" cy="9144000"/>
@@ -110,7 +126,7 @@
   </p:defaultTextStyle>
   <p:extLst>
     <p:ext uri="{EFAFB233-063F-42B5-8137-9DF3F51BA10A}">
-      <p15:sldGuideLst xmlns:p15="http://schemas.microsoft.com/office/powerpoint/2012/main"/>
+      <p15:sldGuideLst xmlns:p15="http://schemas.microsoft.com/office/powerpoint/2012/main" xmlns=""/>
     </p:ext>
   </p:extLst>
 </p:presentation>
@@ -297,7 +313,8 @@
           <a:p>
             <a:fld id="{26BA03D8-62DF-4B05-9C89-3894149A7F3C}" type="datetimeFigureOut">
               <a:rPr lang="vi-VN" smtClean="0"/>
-              <a:t>25/03/2022</a:t>
+              <a:pPr/>
+              <a:t>10/09/2024</a:t>
             </a:fld>
             <a:endParaRPr lang="vi-VN"/>
           </a:p>
@@ -339,6 +356,7 @@
           <a:p>
             <a:fld id="{C3BE32B5-0279-42B6-AFEF-3159C17DD89E}" type="slidenum">
               <a:rPr lang="vi-VN" smtClean="0"/>
+              <a:pPr/>
               <a:t>‹#›</a:t>
             </a:fld>
             <a:endParaRPr lang="vi-VN"/>
@@ -348,7 +366,7 @@
     </p:spTree>
     <p:extLst>
       <p:ext uri="{BB962C8B-B14F-4D97-AF65-F5344CB8AC3E}">
-        <p14:creationId xmlns:p14="http://schemas.microsoft.com/office/powerpoint/2010/main" val="1298462461"/>
+        <p14:creationId xmlns:p14="http://schemas.microsoft.com/office/powerpoint/2010/main" xmlns="" val="1298462461"/>
       </p:ext>
     </p:extLst>
   </p:cSld>
@@ -467,7 +485,8 @@
           <a:p>
             <a:fld id="{26BA03D8-62DF-4B05-9C89-3894149A7F3C}" type="datetimeFigureOut">
               <a:rPr lang="vi-VN" smtClean="0"/>
-              <a:t>25/03/2022</a:t>
+              <a:pPr/>
+              <a:t>10/09/2024</a:t>
             </a:fld>
             <a:endParaRPr lang="vi-VN"/>
           </a:p>
@@ -509,6 +528,7 @@
           <a:p>
             <a:fld id="{C3BE32B5-0279-42B6-AFEF-3159C17DD89E}" type="slidenum">
               <a:rPr lang="vi-VN" smtClean="0"/>
+              <a:pPr/>
               <a:t>‹#›</a:t>
             </a:fld>
             <a:endParaRPr lang="vi-VN"/>
@@ -518,7 +538,7 @@
     </p:spTree>
     <p:extLst>
       <p:ext uri="{BB962C8B-B14F-4D97-AF65-F5344CB8AC3E}">
-        <p14:creationId xmlns:p14="http://schemas.microsoft.com/office/powerpoint/2010/main" val="4249978417"/>
+        <p14:creationId xmlns:p14="http://schemas.microsoft.com/office/powerpoint/2010/main" xmlns="" val="4249978417"/>
       </p:ext>
     </p:extLst>
   </p:cSld>
@@ -647,7 +667,8 @@
           <a:p>
             <a:fld id="{26BA03D8-62DF-4B05-9C89-3894149A7F3C}" type="datetimeFigureOut">
               <a:rPr lang="vi-VN" smtClean="0"/>
-              <a:t>25/03/2022</a:t>
+              <a:pPr/>
+              <a:t>10/09/2024</a:t>
             </a:fld>
             <a:endParaRPr lang="vi-VN"/>
           </a:p>
@@ -689,6 +710,7 @@
           <a:p>
             <a:fld id="{C3BE32B5-0279-42B6-AFEF-3159C17DD89E}" type="slidenum">
               <a:rPr lang="vi-VN" smtClean="0"/>
+              <a:pPr/>
               <a:t>‹#›</a:t>
             </a:fld>
             <a:endParaRPr lang="vi-VN"/>
@@ -698,7 +720,7 @@
     </p:spTree>
     <p:extLst>
       <p:ext uri="{BB962C8B-B14F-4D97-AF65-F5344CB8AC3E}">
-        <p14:creationId xmlns:p14="http://schemas.microsoft.com/office/powerpoint/2010/main" val="4051219644"/>
+        <p14:creationId xmlns:p14="http://schemas.microsoft.com/office/powerpoint/2010/main" xmlns="" val="4051219644"/>
       </p:ext>
     </p:extLst>
   </p:cSld>
@@ -817,7 +839,8 @@
           <a:p>
             <a:fld id="{26BA03D8-62DF-4B05-9C89-3894149A7F3C}" type="datetimeFigureOut">
               <a:rPr lang="vi-VN" smtClean="0"/>
-              <a:t>25/03/2022</a:t>
+              <a:pPr/>
+              <a:t>10/09/2024</a:t>
             </a:fld>
             <a:endParaRPr lang="vi-VN"/>
           </a:p>
@@ -859,6 +882,7 @@
           <a:p>
             <a:fld id="{C3BE32B5-0279-42B6-AFEF-3159C17DD89E}" type="slidenum">
               <a:rPr lang="vi-VN" smtClean="0"/>
+              <a:pPr/>
               <a:t>‹#›</a:t>
             </a:fld>
             <a:endParaRPr lang="vi-VN"/>
@@ -868,7 +892,7 @@
     </p:spTree>
     <p:extLst>
       <p:ext uri="{BB962C8B-B14F-4D97-AF65-F5344CB8AC3E}">
-        <p14:creationId xmlns:p14="http://schemas.microsoft.com/office/powerpoint/2010/main" val="3515365653"/>
+        <p14:creationId xmlns:p14="http://schemas.microsoft.com/office/powerpoint/2010/main" xmlns="" val="3515365653"/>
       </p:ext>
     </p:extLst>
   </p:cSld>
@@ -1063,7 +1087,8 @@
           <a:p>
             <a:fld id="{26BA03D8-62DF-4B05-9C89-3894149A7F3C}" type="datetimeFigureOut">
               <a:rPr lang="vi-VN" smtClean="0"/>
-              <a:t>25/03/2022</a:t>
+              <a:pPr/>
+              <a:t>10/09/2024</a:t>
             </a:fld>
             <a:endParaRPr lang="vi-VN"/>
           </a:p>
@@ -1105,6 +1130,7 @@
           <a:p>
             <a:fld id="{C3BE32B5-0279-42B6-AFEF-3159C17DD89E}" type="slidenum">
               <a:rPr lang="vi-VN" smtClean="0"/>
+              <a:pPr/>
               <a:t>‹#›</a:t>
             </a:fld>
             <a:endParaRPr lang="vi-VN"/>
@@ -1114,7 +1140,7 @@
     </p:spTree>
     <p:extLst>
       <p:ext uri="{BB962C8B-B14F-4D97-AF65-F5344CB8AC3E}">
-        <p14:creationId xmlns:p14="http://schemas.microsoft.com/office/powerpoint/2010/main" val="1378772855"/>
+        <p14:creationId xmlns:p14="http://schemas.microsoft.com/office/powerpoint/2010/main" xmlns="" val="1378772855"/>
       </p:ext>
     </p:extLst>
   </p:cSld>
@@ -1351,7 +1377,8 @@
           <a:p>
             <a:fld id="{26BA03D8-62DF-4B05-9C89-3894149A7F3C}" type="datetimeFigureOut">
               <a:rPr lang="vi-VN" smtClean="0"/>
-              <a:t>25/03/2022</a:t>
+              <a:pPr/>
+              <a:t>10/09/2024</a:t>
             </a:fld>
             <a:endParaRPr lang="vi-VN"/>
           </a:p>
@@ -1393,6 +1420,7 @@
           <a:p>
             <a:fld id="{C3BE32B5-0279-42B6-AFEF-3159C17DD89E}" type="slidenum">
               <a:rPr lang="vi-VN" smtClean="0"/>
+              <a:pPr/>
               <a:t>‹#›</a:t>
             </a:fld>
             <a:endParaRPr lang="vi-VN"/>
@@ -1402,7 +1430,7 @@
     </p:spTree>
     <p:extLst>
       <p:ext uri="{BB962C8B-B14F-4D97-AF65-F5344CB8AC3E}">
-        <p14:creationId xmlns:p14="http://schemas.microsoft.com/office/powerpoint/2010/main" val="1408062622"/>
+        <p14:creationId xmlns:p14="http://schemas.microsoft.com/office/powerpoint/2010/main" xmlns="" val="1408062622"/>
       </p:ext>
     </p:extLst>
   </p:cSld>
@@ -1773,7 +1801,8 @@
           <a:p>
             <a:fld id="{26BA03D8-62DF-4B05-9C89-3894149A7F3C}" type="datetimeFigureOut">
               <a:rPr lang="vi-VN" smtClean="0"/>
-              <a:t>25/03/2022</a:t>
+              <a:pPr/>
+              <a:t>10/09/2024</a:t>
             </a:fld>
             <a:endParaRPr lang="vi-VN"/>
           </a:p>
@@ -1815,6 +1844,7 @@
           <a:p>
             <a:fld id="{C3BE32B5-0279-42B6-AFEF-3159C17DD89E}" type="slidenum">
               <a:rPr lang="vi-VN" smtClean="0"/>
+              <a:pPr/>
               <a:t>‹#›</a:t>
             </a:fld>
             <a:endParaRPr lang="vi-VN"/>
@@ -1824,7 +1854,7 @@
     </p:spTree>
     <p:extLst>
       <p:ext uri="{BB962C8B-B14F-4D97-AF65-F5344CB8AC3E}">
-        <p14:creationId xmlns:p14="http://schemas.microsoft.com/office/powerpoint/2010/main" val="3811908923"/>
+        <p14:creationId xmlns:p14="http://schemas.microsoft.com/office/powerpoint/2010/main" xmlns="" val="3811908923"/>
       </p:ext>
     </p:extLst>
   </p:cSld>
@@ -1891,7 +1921,8 @@
           <a:p>
             <a:fld id="{26BA03D8-62DF-4B05-9C89-3894149A7F3C}" type="datetimeFigureOut">
               <a:rPr lang="vi-VN" smtClean="0"/>
-              <a:t>25/03/2022</a:t>
+              <a:pPr/>
+              <a:t>10/09/2024</a:t>
             </a:fld>
             <a:endParaRPr lang="vi-VN"/>
           </a:p>
@@ -1933,6 +1964,7 @@
           <a:p>
             <a:fld id="{C3BE32B5-0279-42B6-AFEF-3159C17DD89E}" type="slidenum">
               <a:rPr lang="vi-VN" smtClean="0"/>
+              <a:pPr/>
               <a:t>‹#›</a:t>
             </a:fld>
             <a:endParaRPr lang="vi-VN"/>
@@ -1942,7 +1974,7 @@
     </p:spTree>
     <p:extLst>
       <p:ext uri="{BB962C8B-B14F-4D97-AF65-F5344CB8AC3E}">
-        <p14:creationId xmlns:p14="http://schemas.microsoft.com/office/powerpoint/2010/main" val="1166329788"/>
+        <p14:creationId xmlns:p14="http://schemas.microsoft.com/office/powerpoint/2010/main" xmlns="" val="1166329788"/>
       </p:ext>
     </p:extLst>
   </p:cSld>
@@ -1986,7 +2018,8 @@
           <a:p>
             <a:fld id="{26BA03D8-62DF-4B05-9C89-3894149A7F3C}" type="datetimeFigureOut">
               <a:rPr lang="vi-VN" smtClean="0"/>
-              <a:t>25/03/2022</a:t>
+              <a:pPr/>
+              <a:t>10/09/2024</a:t>
             </a:fld>
             <a:endParaRPr lang="vi-VN"/>
           </a:p>
@@ -2028,6 +2061,7 @@
           <a:p>
             <a:fld id="{C3BE32B5-0279-42B6-AFEF-3159C17DD89E}" type="slidenum">
               <a:rPr lang="vi-VN" smtClean="0"/>
+              <a:pPr/>
               <a:t>‹#›</a:t>
             </a:fld>
             <a:endParaRPr lang="vi-VN"/>
@@ -2037,7 +2071,7 @@
     </p:spTree>
     <p:extLst>
       <p:ext uri="{BB962C8B-B14F-4D97-AF65-F5344CB8AC3E}">
-        <p14:creationId xmlns:p14="http://schemas.microsoft.com/office/powerpoint/2010/main" val="1032075722"/>
+        <p14:creationId xmlns:p14="http://schemas.microsoft.com/office/powerpoint/2010/main" xmlns="" val="1032075722"/>
       </p:ext>
     </p:extLst>
   </p:cSld>
@@ -2263,7 +2297,8 @@
           <a:p>
             <a:fld id="{26BA03D8-62DF-4B05-9C89-3894149A7F3C}" type="datetimeFigureOut">
               <a:rPr lang="vi-VN" smtClean="0"/>
-              <a:t>25/03/2022</a:t>
+              <a:pPr/>
+              <a:t>10/09/2024</a:t>
             </a:fld>
             <a:endParaRPr lang="vi-VN"/>
           </a:p>
@@ -2305,6 +2340,7 @@
           <a:p>
             <a:fld id="{C3BE32B5-0279-42B6-AFEF-3159C17DD89E}" type="slidenum">
               <a:rPr lang="vi-VN" smtClean="0"/>
+              <a:pPr/>
               <a:t>‹#›</a:t>
             </a:fld>
             <a:endParaRPr lang="vi-VN"/>
@@ -2314,7 +2350,7 @@
     </p:spTree>
     <p:extLst>
       <p:ext uri="{BB962C8B-B14F-4D97-AF65-F5344CB8AC3E}">
-        <p14:creationId xmlns:p14="http://schemas.microsoft.com/office/powerpoint/2010/main" val="88595841"/>
+        <p14:creationId xmlns:p14="http://schemas.microsoft.com/office/powerpoint/2010/main" xmlns="" val="88595841"/>
       </p:ext>
     </p:extLst>
   </p:cSld>
@@ -2520,7 +2556,8 @@
           <a:p>
             <a:fld id="{26BA03D8-62DF-4B05-9C89-3894149A7F3C}" type="datetimeFigureOut">
               <a:rPr lang="vi-VN" smtClean="0"/>
-              <a:t>25/03/2022</a:t>
+              <a:pPr/>
+              <a:t>10/09/2024</a:t>
             </a:fld>
             <a:endParaRPr lang="vi-VN"/>
           </a:p>
@@ -2562,6 +2599,7 @@
           <a:p>
             <a:fld id="{C3BE32B5-0279-42B6-AFEF-3159C17DD89E}" type="slidenum">
               <a:rPr lang="vi-VN" smtClean="0"/>
+              <a:pPr/>
               <a:t>‹#›</a:t>
             </a:fld>
             <a:endParaRPr lang="vi-VN"/>
@@ -2571,7 +2609,7 @@
     </p:spTree>
     <p:extLst>
       <p:ext uri="{BB962C8B-B14F-4D97-AF65-F5344CB8AC3E}">
-        <p14:creationId xmlns:p14="http://schemas.microsoft.com/office/powerpoint/2010/main" val="2667659561"/>
+        <p14:creationId xmlns:p14="http://schemas.microsoft.com/office/powerpoint/2010/main" xmlns="" val="2667659561"/>
       </p:ext>
     </p:extLst>
   </p:cSld>
@@ -2738,7 +2776,8 @@
           <a:p>
             <a:fld id="{26BA03D8-62DF-4B05-9C89-3894149A7F3C}" type="datetimeFigureOut">
               <a:rPr lang="vi-VN" smtClean="0"/>
-              <a:t>25/03/2022</a:t>
+              <a:pPr/>
+              <a:t>10/09/2024</a:t>
             </a:fld>
             <a:endParaRPr lang="vi-VN"/>
           </a:p>
@@ -2816,6 +2855,7 @@
           <a:p>
             <a:fld id="{C3BE32B5-0279-42B6-AFEF-3159C17DD89E}" type="slidenum">
               <a:rPr lang="vi-VN" smtClean="0"/>
+              <a:pPr/>
               <a:t>‹#›</a:t>
             </a:fld>
             <a:endParaRPr lang="vi-VN"/>
@@ -2825,7 +2865,7 @@
     </p:spTree>
     <p:extLst>
       <p:ext uri="{BB962C8B-B14F-4D97-AF65-F5344CB8AC3E}">
-        <p14:creationId xmlns:p14="http://schemas.microsoft.com/office/powerpoint/2010/main" val="4219236090"/>
+        <p14:creationId xmlns:p14="http://schemas.microsoft.com/office/powerpoint/2010/main" xmlns="" val="4219236090"/>
       </p:ext>
     </p:extLst>
   </p:cSld>
@@ -3150,24 +3190,7 @@
                 <a:latin typeface="微軟正黑體" pitchFamily="34" charset="-120"/>
                 <a:ea typeface="微軟正黑體" pitchFamily="34" charset="-120"/>
               </a:rPr>
-              <a:t>信</a:t>
-            </a:r>
-            <a:r>
-              <a:rPr lang="zh-CN" altLang="en-US" sz="7200" b="1" i="1" dirty="0">
-                <a:solidFill>
-                  <a:srgbClr val="660033"/>
-                </a:solidFill>
-                <a:effectLst>
-                  <a:outerShdw blurRad="38100" dist="38100" dir="2700000" algn="tl">
-                    <a:srgbClr val="000000">
-                      <a:alpha val="43137"/>
-                    </a:srgbClr>
-                  </a:outerShdw>
-                </a:effectLst>
-                <a:latin typeface="微軟正黑體" pitchFamily="34" charset="-120"/>
-                <a:ea typeface="微軟正黑體" pitchFamily="34" charset="-120"/>
-              </a:rPr>
-              <a:t>實的神</a:t>
+              <a:t>信實的神</a:t>
             </a:r>
             <a:endParaRPr lang="zh-TW" altLang="en-US" sz="7200" b="1" i="1" dirty="0">
               <a:solidFill>
@@ -3189,7 +3212,1638 @@
     </p:spTree>
     <p:extLst>
       <p:ext uri="{BB962C8B-B14F-4D97-AF65-F5344CB8AC3E}">
-        <p14:creationId xmlns:p14="http://schemas.microsoft.com/office/powerpoint/2010/main" val="3741120752"/>
+        <p14:creationId xmlns:p14="http://schemas.microsoft.com/office/powerpoint/2010/main" xmlns="" val="3741120752"/>
+      </p:ext>
+    </p:extLst>
+  </p:cSld>
+  <p:clrMapOvr>
+    <a:masterClrMapping/>
+  </p:clrMapOvr>
+</p:sld>
+</file>
+
+<file path=ppt/slides/slide10.xml><?xml version="1.0" encoding="utf-8"?>
+<p:sld xmlns:a="http://schemas.openxmlformats.org/drawingml/2006/main" xmlns:r="http://schemas.openxmlformats.org/officeDocument/2006/relationships" xmlns:p="http://schemas.openxmlformats.org/presentationml/2006/main">
+  <p:cSld>
+    <p:spTree>
+      <p:nvGrpSpPr>
+        <p:cNvPr id="1" name=""/>
+        <p:cNvGrpSpPr/>
+        <p:nvPr/>
+      </p:nvGrpSpPr>
+      <p:grpSpPr>
+        <a:xfrm>
+          <a:off x="0" y="0"/>
+          <a:ext cx="0" cy="0"/>
+          <a:chOff x="0" y="0"/>
+          <a:chExt cx="0" cy="0"/>
+        </a:xfrm>
+      </p:grpSpPr>
+      <p:sp>
+        <p:nvSpPr>
+          <p:cNvPr id="4" name="標題 3"/>
+          <p:cNvSpPr>
+            <a:spLocks noGrp="1"/>
+          </p:cNvSpPr>
+          <p:nvPr>
+            <p:ph type="title"/>
+          </p:nvPr>
+        </p:nvSpPr>
+        <p:spPr>
+          <a:xfrm>
+            <a:off x="0" y="2660915"/>
+            <a:ext cx="12192000" cy="1143000"/>
+          </a:xfrm>
+        </p:spPr>
+        <p:txBody>
+          <a:bodyPr>
+            <a:noAutofit/>
+          </a:bodyPr>
+          <a:lstStyle/>
+          <a:p>
+            <a:r>
+              <a:rPr lang="zh-CN" altLang="en-US" sz="7200" b="1" i="1" dirty="0">
+                <a:solidFill>
+                  <a:srgbClr val="660033"/>
+                </a:solidFill>
+                <a:effectLst>
+                  <a:outerShdw blurRad="38100" dist="38100" dir="2700000" algn="tl">
+                    <a:srgbClr val="000000">
+                      <a:alpha val="43137"/>
+                    </a:srgbClr>
+                  </a:outerShdw>
+                </a:effectLst>
+                <a:latin typeface="微軟正黑體" pitchFamily="34" charset="-120"/>
+                <a:ea typeface="微軟正黑體" pitchFamily="34" charset="-120"/>
+              </a:rPr>
+              <a:t>信實的神</a:t>
+            </a:r>
+            <a:endParaRPr lang="zh-TW" altLang="en-US" sz="7200" b="1" i="1" dirty="0">
+              <a:solidFill>
+                <a:srgbClr val="660033"/>
+              </a:solidFill>
+              <a:effectLst>
+                <a:outerShdw blurRad="38100" dist="38100" dir="2700000" algn="tl">
+                  <a:srgbClr val="000000">
+                    <a:alpha val="43137"/>
+                  </a:srgbClr>
+                </a:outerShdw>
+              </a:effectLst>
+              <a:latin typeface="微軟正黑體" pitchFamily="34" charset="-120"/>
+              <a:ea typeface="微軟正黑體" pitchFamily="34" charset="-120"/>
+            </a:endParaRPr>
+          </a:p>
+        </p:txBody>
+      </p:sp>
+    </p:spTree>
+    <p:extLst>
+      <p:ext uri="{BB962C8B-B14F-4D97-AF65-F5344CB8AC3E}">
+        <p14:creationId xmlns:p14="http://schemas.microsoft.com/office/powerpoint/2010/main" xmlns="" val="3741120752"/>
+      </p:ext>
+    </p:extLst>
+  </p:cSld>
+  <p:clrMapOvr>
+    <a:masterClrMapping/>
+  </p:clrMapOvr>
+</p:sld>
+</file>
+
+<file path=ppt/slides/slide11.xml><?xml version="1.0" encoding="utf-8"?>
+<p:sld xmlns:a="http://schemas.openxmlformats.org/drawingml/2006/main" xmlns:r="http://schemas.openxmlformats.org/officeDocument/2006/relationships" xmlns:p="http://schemas.openxmlformats.org/presentationml/2006/main">
+  <p:cSld>
+    <p:spTree>
+      <p:nvGrpSpPr>
+        <p:cNvPr id="1" name=""/>
+        <p:cNvGrpSpPr/>
+        <p:nvPr/>
+      </p:nvGrpSpPr>
+      <p:grpSpPr>
+        <a:xfrm>
+          <a:off x="0" y="0"/>
+          <a:ext cx="0" cy="0"/>
+          <a:chOff x="0" y="0"/>
+          <a:chExt cx="0" cy="0"/>
+        </a:xfrm>
+      </p:grpSpPr>
+      <p:sp>
+        <p:nvSpPr>
+          <p:cNvPr id="5" name="內容版面配置區 4"/>
+          <p:cNvSpPr>
+            <a:spLocks noGrp="1"/>
+          </p:cNvSpPr>
+          <p:nvPr>
+            <p:ph idx="1"/>
+          </p:nvPr>
+        </p:nvSpPr>
+        <p:spPr>
+          <a:xfrm>
+            <a:off x="0" y="2084851"/>
+            <a:ext cx="12192000" cy="2404863"/>
+          </a:xfrm>
+        </p:spPr>
+        <p:txBody>
+          <a:bodyPr anchor="ctr">
+            <a:normAutofit/>
+          </a:bodyPr>
+          <a:lstStyle/>
+          <a:p>
+            <a:pPr marL="0" indent="0" algn="ctr">
+              <a:buNone/>
+            </a:pPr>
+            <a:r>
+              <a:rPr lang="zh-TW" altLang="en-US" sz="6400" b="1" dirty="0">
+                <a:solidFill>
+                  <a:srgbClr val="660033"/>
+                </a:solidFill>
+                <a:latin typeface="Microsoft JhengHei" panose="020B0604030504040204" pitchFamily="34" charset="-120"/>
+                <a:ea typeface="Microsoft JhengHei" panose="020B0604030504040204" pitchFamily="34" charset="-120"/>
+              </a:rPr>
+              <a:t>信實的神</a:t>
+            </a:r>
+            <a:r>
+              <a:rPr lang="zh-CN" altLang="en-US" sz="6400" b="1" dirty="0">
+                <a:solidFill>
+                  <a:srgbClr val="660033"/>
+                </a:solidFill>
+                <a:latin typeface="Microsoft JhengHei" panose="020B0604030504040204" pitchFamily="34" charset="-120"/>
+                <a:ea typeface="Microsoft JhengHei" panose="020B0604030504040204" pitchFamily="34" charset="-120"/>
+              </a:rPr>
+              <a:t>袮</a:t>
+            </a:r>
+            <a:r>
+              <a:rPr lang="zh-TW" altLang="en-US" sz="6400" b="1" dirty="0">
+                <a:solidFill>
+                  <a:srgbClr val="660033"/>
+                </a:solidFill>
+                <a:latin typeface="Microsoft JhengHei" panose="020B0604030504040204" pitchFamily="34" charset="-120"/>
+                <a:ea typeface="Microsoft JhengHei" panose="020B0604030504040204" pitchFamily="34" charset="-120"/>
+              </a:rPr>
+              <a:t>永遠不改變</a:t>
+            </a:r>
+            <a:endParaRPr lang="en-US" altLang="zh-TW" sz="6400" b="1" dirty="0">
+              <a:solidFill>
+                <a:srgbClr val="660033"/>
+              </a:solidFill>
+              <a:latin typeface="Microsoft JhengHei" panose="020B0604030504040204" pitchFamily="34" charset="-120"/>
+              <a:ea typeface="Microsoft JhengHei" panose="020B0604030504040204" pitchFamily="34" charset="-120"/>
+            </a:endParaRPr>
+          </a:p>
+          <a:p>
+            <a:pPr marL="0" indent="0" algn="ctr">
+              <a:buNone/>
+            </a:pPr>
+            <a:r>
+              <a:rPr lang="zh-TW" altLang="en-US" sz="6400" b="1" dirty="0">
+                <a:solidFill>
+                  <a:srgbClr val="660033"/>
+                </a:solidFill>
+                <a:latin typeface="Microsoft JhengHei" panose="020B0604030504040204" pitchFamily="34" charset="-120"/>
+                <a:ea typeface="Microsoft JhengHei" panose="020B0604030504040204" pitchFamily="34" charset="-120"/>
+              </a:rPr>
+              <a:t>信實的神</a:t>
+            </a:r>
+            <a:r>
+              <a:rPr lang="zh-CN" altLang="en-US" sz="6400" b="1" dirty="0">
+                <a:solidFill>
+                  <a:srgbClr val="660033"/>
+                </a:solidFill>
+                <a:latin typeface="Microsoft JhengHei" panose="020B0604030504040204" pitchFamily="34" charset="-120"/>
+                <a:ea typeface="Microsoft JhengHei" panose="020B0604030504040204" pitchFamily="34" charset="-120"/>
+              </a:rPr>
+              <a:t>袮</a:t>
+            </a:r>
+            <a:r>
+              <a:rPr lang="zh-TW" altLang="en-US" sz="6400" b="1" dirty="0">
+                <a:solidFill>
+                  <a:srgbClr val="660033"/>
+                </a:solidFill>
+                <a:latin typeface="Microsoft JhengHei" panose="020B0604030504040204" pitchFamily="34" charset="-120"/>
+                <a:ea typeface="Microsoft JhengHei" panose="020B0604030504040204" pitchFamily="34" charset="-120"/>
+              </a:rPr>
+              <a:t>永遠不改變</a:t>
+            </a:r>
+            <a:endParaRPr lang="en-US" altLang="zh-TW" sz="6400" b="1" dirty="0">
+              <a:solidFill>
+                <a:srgbClr val="660033"/>
+              </a:solidFill>
+              <a:latin typeface="Microsoft JhengHei" panose="020B0604030504040204" pitchFamily="34" charset="-120"/>
+              <a:ea typeface="Microsoft JhengHei" panose="020B0604030504040204" pitchFamily="34" charset="-120"/>
+            </a:endParaRPr>
+          </a:p>
+        </p:txBody>
+      </p:sp>
+      <p:sp>
+        <p:nvSpPr>
+          <p:cNvPr id="3" name="TextBox 2"/>
+          <p:cNvSpPr txBox="1"/>
+          <p:nvPr/>
+        </p:nvSpPr>
+        <p:spPr>
+          <a:xfrm>
+            <a:off x="178" y="5373218"/>
+            <a:ext cx="12191823" cy="769441"/>
+          </a:xfrm>
+          <a:prstGeom prst="rect">
+            <a:avLst/>
+          </a:prstGeom>
+          <a:noFill/>
+        </p:spPr>
+        <p:txBody>
+          <a:bodyPr wrap="square" rtlCol="0" anchor="ctr">
+            <a:spAutoFit/>
+          </a:bodyPr>
+          <a:lstStyle/>
+          <a:p>
+            <a:pPr algn="ctr"/>
+            <a:r>
+              <a:rPr lang="en-US" sz="4400" b="1" dirty="0">
+                <a:solidFill>
+                  <a:srgbClr val="660033"/>
+                </a:solidFill>
+                <a:effectLst/>
+                <a:latin typeface="Microsoft JhengHei" panose="020B0604030504040204" pitchFamily="34" charset="-120"/>
+                <a:ea typeface="Microsoft JhengHei" panose="020B0604030504040204" pitchFamily="34" charset="-120"/>
+              </a:rPr>
+              <a:t>( </a:t>
+            </a:r>
+            <a:r>
+              <a:rPr lang="zh-CN" altLang="en-US" sz="4400" b="1" dirty="0">
+                <a:solidFill>
+                  <a:srgbClr val="660033"/>
+                </a:solidFill>
+                <a:effectLst/>
+                <a:latin typeface="Microsoft JhengHei" panose="020B0604030504040204" pitchFamily="34" charset="-120"/>
+                <a:ea typeface="Microsoft JhengHei" panose="020B0604030504040204" pitchFamily="34" charset="-120"/>
+              </a:rPr>
+              <a:t>正</a:t>
+            </a:r>
+            <a:r>
+              <a:rPr lang="en-US" sz="4400" b="1" dirty="0">
+                <a:solidFill>
+                  <a:srgbClr val="660033"/>
+                </a:solidFill>
+                <a:effectLst/>
+                <a:latin typeface="Microsoft JhengHei" panose="020B0604030504040204" pitchFamily="34" charset="-120"/>
+                <a:ea typeface="Microsoft JhengHei" panose="020B0604030504040204" pitchFamily="34" charset="-120"/>
+              </a:rPr>
+              <a:t> )</a:t>
+            </a:r>
+            <a:endParaRPr lang="vi-VN" sz="4400" b="1" dirty="0">
+              <a:solidFill>
+                <a:srgbClr val="660033"/>
+              </a:solidFill>
+              <a:effectLst/>
+              <a:ea typeface="Microsoft JhengHei" panose="020B0604030504040204" pitchFamily="34" charset="-120"/>
+            </a:endParaRPr>
+          </a:p>
+        </p:txBody>
+      </p:sp>
+    </p:spTree>
+    <p:extLst>
+      <p:ext uri="{BB962C8B-B14F-4D97-AF65-F5344CB8AC3E}">
+        <p14:creationId xmlns:p14="http://schemas.microsoft.com/office/powerpoint/2010/main" xmlns="" val="1872291190"/>
+      </p:ext>
+    </p:extLst>
+  </p:cSld>
+  <p:clrMapOvr>
+    <a:masterClrMapping/>
+  </p:clrMapOvr>
+</p:sld>
+</file>
+
+<file path=ppt/slides/slide12.xml><?xml version="1.0" encoding="utf-8"?>
+<p:sld xmlns:a="http://schemas.openxmlformats.org/drawingml/2006/main" xmlns:r="http://schemas.openxmlformats.org/officeDocument/2006/relationships" xmlns:p="http://schemas.openxmlformats.org/presentationml/2006/main">
+  <p:cSld>
+    <p:spTree>
+      <p:nvGrpSpPr>
+        <p:cNvPr id="1" name=""/>
+        <p:cNvGrpSpPr/>
+        <p:nvPr/>
+      </p:nvGrpSpPr>
+      <p:grpSpPr>
+        <a:xfrm>
+          <a:off x="0" y="0"/>
+          <a:ext cx="0" cy="0"/>
+          <a:chOff x="0" y="0"/>
+          <a:chExt cx="0" cy="0"/>
+        </a:xfrm>
+      </p:grpSpPr>
+      <p:sp>
+        <p:nvSpPr>
+          <p:cNvPr id="5" name="內容版面配置區 4"/>
+          <p:cNvSpPr>
+            <a:spLocks noGrp="1"/>
+          </p:cNvSpPr>
+          <p:nvPr>
+            <p:ph idx="1"/>
+          </p:nvPr>
+        </p:nvSpPr>
+        <p:spPr>
+          <a:xfrm>
+            <a:off x="0" y="2084851"/>
+            <a:ext cx="12192000" cy="2404863"/>
+          </a:xfrm>
+        </p:spPr>
+        <p:txBody>
+          <a:bodyPr anchor="ctr">
+            <a:normAutofit/>
+          </a:bodyPr>
+          <a:lstStyle/>
+          <a:p>
+            <a:pPr marL="0" indent="0" algn="ctr">
+              <a:buNone/>
+            </a:pPr>
+            <a:r>
+              <a:rPr lang="zh-TW" altLang="en-US" sz="6400" b="1" dirty="0">
+                <a:solidFill>
+                  <a:srgbClr val="660033"/>
+                </a:solidFill>
+                <a:latin typeface="Microsoft JhengHei" panose="020B0604030504040204" pitchFamily="34" charset="-120"/>
+                <a:ea typeface="Microsoft JhengHei" panose="020B0604030504040204" pitchFamily="34" charset="-120"/>
+              </a:rPr>
+              <a:t>依靠耶和華的人好像錫安山</a:t>
+            </a:r>
+            <a:endParaRPr lang="en-US" altLang="zh-TW" sz="6400" b="1" dirty="0">
+              <a:solidFill>
+                <a:srgbClr val="660033"/>
+              </a:solidFill>
+              <a:latin typeface="Microsoft JhengHei" panose="020B0604030504040204" pitchFamily="34" charset="-120"/>
+              <a:ea typeface="Microsoft JhengHei" panose="020B0604030504040204" pitchFamily="34" charset="-120"/>
+            </a:endParaRPr>
+          </a:p>
+          <a:p>
+            <a:pPr marL="0" indent="0" algn="ctr">
+              <a:buNone/>
+            </a:pPr>
+            <a:r>
+              <a:rPr lang="zh-TW" altLang="en-US" sz="6400" b="1" dirty="0">
+                <a:solidFill>
+                  <a:srgbClr val="660033"/>
+                </a:solidFill>
+                <a:latin typeface="Microsoft JhengHei" panose="020B0604030504040204" pitchFamily="34" charset="-120"/>
+                <a:ea typeface="Microsoft JhengHei" panose="020B0604030504040204" pitchFamily="34" charset="-120"/>
+              </a:rPr>
+              <a:t>哈利路亞  永不動搖</a:t>
+            </a:r>
+            <a:endParaRPr lang="vi-VN" sz="6400" b="1" dirty="0">
+              <a:solidFill>
+                <a:srgbClr val="660033"/>
+              </a:solidFill>
+              <a:ea typeface="Microsoft JhengHei" panose="020B0604030504040204" pitchFamily="34" charset="-120"/>
+            </a:endParaRPr>
+          </a:p>
+        </p:txBody>
+      </p:sp>
+      <p:sp>
+        <p:nvSpPr>
+          <p:cNvPr id="3" name="TextBox 2"/>
+          <p:cNvSpPr txBox="1"/>
+          <p:nvPr/>
+        </p:nvSpPr>
+        <p:spPr>
+          <a:xfrm>
+            <a:off x="178" y="5373218"/>
+            <a:ext cx="12191823" cy="769441"/>
+          </a:xfrm>
+          <a:prstGeom prst="rect">
+            <a:avLst/>
+          </a:prstGeom>
+          <a:noFill/>
+        </p:spPr>
+        <p:txBody>
+          <a:bodyPr wrap="square" rtlCol="0" anchor="ctr">
+            <a:spAutoFit/>
+          </a:bodyPr>
+          <a:lstStyle/>
+          <a:p>
+            <a:pPr algn="ctr"/>
+            <a:r>
+              <a:rPr lang="en-US" sz="4400" b="1" dirty="0">
+                <a:solidFill>
+                  <a:srgbClr val="660033"/>
+                </a:solidFill>
+                <a:effectLst/>
+                <a:latin typeface="Microsoft JhengHei" panose="020B0604030504040204" pitchFamily="34" charset="-120"/>
+                <a:ea typeface="Microsoft JhengHei" panose="020B0604030504040204" pitchFamily="34" charset="-120"/>
+              </a:rPr>
+              <a:t>( </a:t>
+            </a:r>
+            <a:r>
+              <a:rPr lang="zh-CN" altLang="en-US" sz="4400" b="1" dirty="0">
+                <a:solidFill>
+                  <a:srgbClr val="660033"/>
+                </a:solidFill>
+                <a:effectLst/>
+                <a:latin typeface="Microsoft JhengHei" panose="020B0604030504040204" pitchFamily="34" charset="-120"/>
+                <a:ea typeface="Microsoft JhengHei" panose="020B0604030504040204" pitchFamily="34" charset="-120"/>
+              </a:rPr>
+              <a:t>正</a:t>
+            </a:r>
+            <a:r>
+              <a:rPr lang="en-US" sz="4400" b="1" dirty="0">
+                <a:solidFill>
+                  <a:srgbClr val="660033"/>
+                </a:solidFill>
+                <a:effectLst/>
+                <a:latin typeface="Microsoft JhengHei" panose="020B0604030504040204" pitchFamily="34" charset="-120"/>
+                <a:ea typeface="Microsoft JhengHei" panose="020B0604030504040204" pitchFamily="34" charset="-120"/>
+              </a:rPr>
+              <a:t> )</a:t>
+            </a:r>
+            <a:endParaRPr lang="vi-VN" sz="4400" b="1" dirty="0">
+              <a:solidFill>
+                <a:srgbClr val="660033"/>
+              </a:solidFill>
+              <a:effectLst/>
+              <a:ea typeface="Microsoft JhengHei" panose="020B0604030504040204" pitchFamily="34" charset="-120"/>
+            </a:endParaRPr>
+          </a:p>
+        </p:txBody>
+      </p:sp>
+    </p:spTree>
+    <p:extLst>
+      <p:ext uri="{BB962C8B-B14F-4D97-AF65-F5344CB8AC3E}">
+        <p14:creationId xmlns:p14="http://schemas.microsoft.com/office/powerpoint/2010/main" xmlns="" val="2071030861"/>
+      </p:ext>
+    </p:extLst>
+  </p:cSld>
+  <p:clrMapOvr>
+    <a:masterClrMapping/>
+  </p:clrMapOvr>
+</p:sld>
+</file>
+
+<file path=ppt/slides/slide13.xml><?xml version="1.0" encoding="utf-8"?>
+<p:sld xmlns:a="http://schemas.openxmlformats.org/drawingml/2006/main" xmlns:r="http://schemas.openxmlformats.org/officeDocument/2006/relationships" xmlns:p="http://schemas.openxmlformats.org/presentationml/2006/main">
+  <p:cSld>
+    <p:spTree>
+      <p:nvGrpSpPr>
+        <p:cNvPr id="1" name=""/>
+        <p:cNvGrpSpPr/>
+        <p:nvPr/>
+      </p:nvGrpSpPr>
+      <p:grpSpPr>
+        <a:xfrm>
+          <a:off x="0" y="0"/>
+          <a:ext cx="0" cy="0"/>
+          <a:chOff x="0" y="0"/>
+          <a:chExt cx="0" cy="0"/>
+        </a:xfrm>
+      </p:grpSpPr>
+      <p:sp>
+        <p:nvSpPr>
+          <p:cNvPr id="5" name="內容版面配置區 4"/>
+          <p:cNvSpPr>
+            <a:spLocks noGrp="1"/>
+          </p:cNvSpPr>
+          <p:nvPr>
+            <p:ph idx="1"/>
+          </p:nvPr>
+        </p:nvSpPr>
+        <p:spPr>
+          <a:xfrm>
+            <a:off x="0" y="2084851"/>
+            <a:ext cx="12192000" cy="2404863"/>
+          </a:xfrm>
+        </p:spPr>
+        <p:txBody>
+          <a:bodyPr anchor="ctr">
+            <a:normAutofit/>
+          </a:bodyPr>
+          <a:lstStyle/>
+          <a:p>
+            <a:pPr marL="0" indent="0" algn="ctr">
+              <a:buNone/>
+            </a:pPr>
+            <a:r>
+              <a:rPr lang="zh-TW" altLang="en-US" sz="6400" b="1" dirty="0">
+                <a:solidFill>
+                  <a:srgbClr val="660033"/>
+                </a:solidFill>
+                <a:latin typeface="Microsoft JhengHei" panose="020B0604030504040204" pitchFamily="34" charset="-120"/>
+                <a:ea typeface="Microsoft JhengHei" panose="020B0604030504040204" pitchFamily="34" charset="-120"/>
+              </a:rPr>
+              <a:t>祂的應許永不改變不落空</a:t>
+            </a:r>
+            <a:endParaRPr lang="en-US" altLang="zh-TW" sz="6400" b="1" dirty="0">
+              <a:solidFill>
+                <a:srgbClr val="660033"/>
+              </a:solidFill>
+              <a:latin typeface="Microsoft JhengHei" panose="020B0604030504040204" pitchFamily="34" charset="-120"/>
+              <a:ea typeface="Microsoft JhengHei" panose="020B0604030504040204" pitchFamily="34" charset="-120"/>
+            </a:endParaRPr>
+          </a:p>
+          <a:p>
+            <a:pPr marL="0" indent="0" algn="ctr">
+              <a:buNone/>
+            </a:pPr>
+            <a:r>
+              <a:rPr lang="zh-TW" altLang="en-US" sz="6400" b="1" dirty="0">
+                <a:solidFill>
+                  <a:srgbClr val="660033"/>
+                </a:solidFill>
+                <a:latin typeface="Microsoft JhengHei" panose="020B0604030504040204" pitchFamily="34" charset="-120"/>
+                <a:ea typeface="Microsoft JhengHei" panose="020B0604030504040204" pitchFamily="34" charset="-120"/>
+              </a:rPr>
+              <a:t>眾山怎樣圍繞耶路撒冷</a:t>
+            </a:r>
+            <a:endParaRPr lang="en-US" altLang="zh-TW" sz="6400" b="1" dirty="0">
+              <a:solidFill>
+                <a:srgbClr val="660033"/>
+              </a:solidFill>
+              <a:latin typeface="Microsoft JhengHei" panose="020B0604030504040204" pitchFamily="34" charset="-120"/>
+              <a:ea typeface="Microsoft JhengHei" panose="020B0604030504040204" pitchFamily="34" charset="-120"/>
+            </a:endParaRPr>
+          </a:p>
+        </p:txBody>
+      </p:sp>
+      <p:sp>
+        <p:nvSpPr>
+          <p:cNvPr id="3" name="TextBox 2"/>
+          <p:cNvSpPr txBox="1"/>
+          <p:nvPr/>
+        </p:nvSpPr>
+        <p:spPr>
+          <a:xfrm>
+            <a:off x="178" y="5373218"/>
+            <a:ext cx="12191823" cy="769441"/>
+          </a:xfrm>
+          <a:prstGeom prst="rect">
+            <a:avLst/>
+          </a:prstGeom>
+          <a:noFill/>
+        </p:spPr>
+        <p:txBody>
+          <a:bodyPr wrap="square" rtlCol="0" anchor="ctr">
+            <a:spAutoFit/>
+          </a:bodyPr>
+          <a:lstStyle/>
+          <a:p>
+            <a:pPr algn="ctr"/>
+            <a:r>
+              <a:rPr lang="en-US" sz="4400" b="1" dirty="0">
+                <a:solidFill>
+                  <a:srgbClr val="660033"/>
+                </a:solidFill>
+                <a:effectLst/>
+                <a:latin typeface="Microsoft JhengHei" panose="020B0604030504040204" pitchFamily="34" charset="-120"/>
+                <a:ea typeface="Microsoft JhengHei" panose="020B0604030504040204" pitchFamily="34" charset="-120"/>
+              </a:rPr>
+              <a:t>( </a:t>
+            </a:r>
+            <a:r>
+              <a:rPr lang="zh-CN" altLang="en-US" sz="4400" b="1" dirty="0">
+                <a:solidFill>
+                  <a:srgbClr val="660033"/>
+                </a:solidFill>
+                <a:effectLst/>
+                <a:latin typeface="Microsoft JhengHei" panose="020B0604030504040204" pitchFamily="34" charset="-120"/>
+                <a:ea typeface="Microsoft JhengHei" panose="020B0604030504040204" pitchFamily="34" charset="-120"/>
+              </a:rPr>
+              <a:t>副</a:t>
+            </a:r>
+            <a:r>
+              <a:rPr lang="en-US" sz="4400" b="1" dirty="0">
+                <a:solidFill>
+                  <a:srgbClr val="660033"/>
+                </a:solidFill>
+                <a:effectLst/>
+                <a:latin typeface="Microsoft JhengHei" panose="020B0604030504040204" pitchFamily="34" charset="-120"/>
+                <a:ea typeface="Microsoft JhengHei" panose="020B0604030504040204" pitchFamily="34" charset="-120"/>
+              </a:rPr>
+              <a:t> )</a:t>
+            </a:r>
+            <a:endParaRPr lang="vi-VN" sz="4400" b="1" dirty="0">
+              <a:solidFill>
+                <a:srgbClr val="660033"/>
+              </a:solidFill>
+              <a:effectLst/>
+              <a:ea typeface="Microsoft JhengHei" panose="020B0604030504040204" pitchFamily="34" charset="-120"/>
+            </a:endParaRPr>
+          </a:p>
+        </p:txBody>
+      </p:sp>
+    </p:spTree>
+    <p:extLst>
+      <p:ext uri="{BB962C8B-B14F-4D97-AF65-F5344CB8AC3E}">
+        <p14:creationId xmlns:p14="http://schemas.microsoft.com/office/powerpoint/2010/main" xmlns="" val="3850034681"/>
+      </p:ext>
+    </p:extLst>
+  </p:cSld>
+  <p:clrMapOvr>
+    <a:masterClrMapping/>
+  </p:clrMapOvr>
+</p:sld>
+</file>
+
+<file path=ppt/slides/slide14.xml><?xml version="1.0" encoding="utf-8"?>
+<p:sld xmlns:a="http://schemas.openxmlformats.org/drawingml/2006/main" xmlns:r="http://schemas.openxmlformats.org/officeDocument/2006/relationships" xmlns:p="http://schemas.openxmlformats.org/presentationml/2006/main">
+  <p:cSld>
+    <p:spTree>
+      <p:nvGrpSpPr>
+        <p:cNvPr id="1" name=""/>
+        <p:cNvGrpSpPr/>
+        <p:nvPr/>
+      </p:nvGrpSpPr>
+      <p:grpSpPr>
+        <a:xfrm>
+          <a:off x="0" y="0"/>
+          <a:ext cx="0" cy="0"/>
+          <a:chOff x="0" y="0"/>
+          <a:chExt cx="0" cy="0"/>
+        </a:xfrm>
+      </p:grpSpPr>
+      <p:sp>
+        <p:nvSpPr>
+          <p:cNvPr id="5" name="內容版面配置區 4"/>
+          <p:cNvSpPr>
+            <a:spLocks noGrp="1"/>
+          </p:cNvSpPr>
+          <p:nvPr>
+            <p:ph idx="1"/>
+          </p:nvPr>
+        </p:nvSpPr>
+        <p:spPr>
+          <a:xfrm>
+            <a:off x="0" y="2084851"/>
+            <a:ext cx="12192000" cy="2404863"/>
+          </a:xfrm>
+        </p:spPr>
+        <p:txBody>
+          <a:bodyPr anchor="ctr">
+            <a:normAutofit/>
+          </a:bodyPr>
+          <a:lstStyle/>
+          <a:p>
+            <a:pPr marL="0" indent="0" algn="ctr">
+              <a:buNone/>
+            </a:pPr>
+            <a:r>
+              <a:rPr lang="zh-TW" altLang="en-US" sz="6400" b="1" dirty="0">
+                <a:solidFill>
+                  <a:srgbClr val="660033"/>
+                </a:solidFill>
+                <a:latin typeface="Microsoft JhengHei" panose="020B0604030504040204" pitchFamily="34" charset="-120"/>
+                <a:ea typeface="Microsoft JhengHei" panose="020B0604030504040204" pitchFamily="34" charset="-120"/>
+              </a:rPr>
+              <a:t>耶和華也照樣圍繞我們</a:t>
+            </a:r>
+            <a:endParaRPr lang="en-US" altLang="zh-TW" sz="6400" b="1" dirty="0">
+              <a:solidFill>
+                <a:srgbClr val="660033"/>
+              </a:solidFill>
+              <a:latin typeface="Microsoft JhengHei" panose="020B0604030504040204" pitchFamily="34" charset="-120"/>
+              <a:ea typeface="Microsoft JhengHei" panose="020B0604030504040204" pitchFamily="34" charset="-120"/>
+            </a:endParaRPr>
+          </a:p>
+          <a:p>
+            <a:pPr marL="0" indent="0" algn="ctr">
+              <a:buNone/>
+            </a:pPr>
+            <a:r>
+              <a:rPr lang="zh-TW" altLang="en-US" sz="6400" b="1" dirty="0">
+                <a:solidFill>
+                  <a:srgbClr val="660033"/>
+                </a:solidFill>
+                <a:latin typeface="Microsoft JhengHei" panose="020B0604030504040204" pitchFamily="34" charset="-120"/>
+                <a:ea typeface="Microsoft JhengHei" panose="020B0604030504040204" pitchFamily="34" charset="-120"/>
+              </a:rPr>
+              <a:t>從今時直到永遠</a:t>
+            </a:r>
+            <a:endParaRPr lang="vi-VN" sz="6400" b="1" dirty="0">
+              <a:solidFill>
+                <a:srgbClr val="660033"/>
+              </a:solidFill>
+              <a:latin typeface="Microsoft JhengHei" panose="020B0604030504040204" pitchFamily="34" charset="-120"/>
+              <a:ea typeface="Microsoft JhengHei" panose="020B0604030504040204" pitchFamily="34" charset="-120"/>
+            </a:endParaRPr>
+          </a:p>
+        </p:txBody>
+      </p:sp>
+      <p:sp>
+        <p:nvSpPr>
+          <p:cNvPr id="3" name="TextBox 2"/>
+          <p:cNvSpPr txBox="1"/>
+          <p:nvPr/>
+        </p:nvSpPr>
+        <p:spPr>
+          <a:xfrm>
+            <a:off x="178" y="5373218"/>
+            <a:ext cx="12191823" cy="769441"/>
+          </a:xfrm>
+          <a:prstGeom prst="rect">
+            <a:avLst/>
+          </a:prstGeom>
+          <a:noFill/>
+        </p:spPr>
+        <p:txBody>
+          <a:bodyPr wrap="square" rtlCol="0" anchor="ctr">
+            <a:spAutoFit/>
+          </a:bodyPr>
+          <a:lstStyle/>
+          <a:p>
+            <a:pPr algn="ctr"/>
+            <a:r>
+              <a:rPr lang="en-US" sz="4400" b="1" dirty="0">
+                <a:solidFill>
+                  <a:srgbClr val="660033"/>
+                </a:solidFill>
+                <a:effectLst/>
+                <a:latin typeface="Microsoft JhengHei" panose="020B0604030504040204" pitchFamily="34" charset="-120"/>
+                <a:ea typeface="Microsoft JhengHei" panose="020B0604030504040204" pitchFamily="34" charset="-120"/>
+              </a:rPr>
+              <a:t>( </a:t>
+            </a:r>
+            <a:r>
+              <a:rPr lang="zh-CN" altLang="en-US" sz="4400" b="1" dirty="0">
+                <a:solidFill>
+                  <a:srgbClr val="660033"/>
+                </a:solidFill>
+                <a:effectLst/>
+                <a:latin typeface="Microsoft JhengHei" panose="020B0604030504040204" pitchFamily="34" charset="-120"/>
+                <a:ea typeface="Microsoft JhengHei" panose="020B0604030504040204" pitchFamily="34" charset="-120"/>
+              </a:rPr>
+              <a:t>副</a:t>
+            </a:r>
+            <a:r>
+              <a:rPr lang="en-US" sz="4400" b="1" dirty="0">
+                <a:solidFill>
+                  <a:srgbClr val="660033"/>
+                </a:solidFill>
+                <a:effectLst/>
+                <a:latin typeface="Microsoft JhengHei" panose="020B0604030504040204" pitchFamily="34" charset="-120"/>
+                <a:ea typeface="Microsoft JhengHei" panose="020B0604030504040204" pitchFamily="34" charset="-120"/>
+              </a:rPr>
+              <a:t> )</a:t>
+            </a:r>
+            <a:endParaRPr lang="vi-VN" sz="4400" b="1" dirty="0">
+              <a:solidFill>
+                <a:srgbClr val="660033"/>
+              </a:solidFill>
+              <a:effectLst/>
+              <a:ea typeface="Microsoft JhengHei" panose="020B0604030504040204" pitchFamily="34" charset="-120"/>
+            </a:endParaRPr>
+          </a:p>
+        </p:txBody>
+      </p:sp>
+    </p:spTree>
+    <p:extLst>
+      <p:ext uri="{BB962C8B-B14F-4D97-AF65-F5344CB8AC3E}">
+        <p14:creationId xmlns:p14="http://schemas.microsoft.com/office/powerpoint/2010/main" xmlns="" val="254690880"/>
+      </p:ext>
+    </p:extLst>
+  </p:cSld>
+  <p:clrMapOvr>
+    <a:masterClrMapping/>
+  </p:clrMapOvr>
+</p:sld>
+</file>
+
+<file path=ppt/slides/slide15.xml><?xml version="1.0" encoding="utf-8"?>
+<p:sld xmlns:a="http://schemas.openxmlformats.org/drawingml/2006/main" xmlns:r="http://schemas.openxmlformats.org/officeDocument/2006/relationships" xmlns:p="http://schemas.openxmlformats.org/presentationml/2006/main">
+  <p:cSld>
+    <p:spTree>
+      <p:nvGrpSpPr>
+        <p:cNvPr id="1" name=""/>
+        <p:cNvGrpSpPr/>
+        <p:nvPr/>
+      </p:nvGrpSpPr>
+      <p:grpSpPr>
+        <a:xfrm>
+          <a:off x="0" y="0"/>
+          <a:ext cx="0" cy="0"/>
+          <a:chOff x="0" y="0"/>
+          <a:chExt cx="0" cy="0"/>
+        </a:xfrm>
+      </p:grpSpPr>
+      <p:sp>
+        <p:nvSpPr>
+          <p:cNvPr id="5" name="內容版面配置區 4"/>
+          <p:cNvSpPr>
+            <a:spLocks noGrp="1"/>
+          </p:cNvSpPr>
+          <p:nvPr>
+            <p:ph idx="1"/>
+          </p:nvPr>
+        </p:nvSpPr>
+        <p:spPr>
+          <a:xfrm>
+            <a:off x="0" y="2084851"/>
+            <a:ext cx="12192000" cy="2404863"/>
+          </a:xfrm>
+        </p:spPr>
+        <p:txBody>
+          <a:bodyPr anchor="ctr">
+            <a:normAutofit/>
+          </a:bodyPr>
+          <a:lstStyle/>
+          <a:p>
+            <a:pPr marL="0" indent="0" algn="ctr">
+              <a:buNone/>
+            </a:pPr>
+            <a:r>
+              <a:rPr lang="zh-TW" altLang="en-US" sz="6400" b="1" dirty="0">
+                <a:solidFill>
+                  <a:srgbClr val="660033"/>
+                </a:solidFill>
+                <a:latin typeface="Microsoft JhengHei" panose="020B0604030504040204" pitchFamily="34" charset="-120"/>
+                <a:ea typeface="Microsoft JhengHei" panose="020B0604030504040204" pitchFamily="34" charset="-120"/>
+              </a:rPr>
+              <a:t>信實的神</a:t>
+            </a:r>
+            <a:r>
+              <a:rPr lang="zh-CN" altLang="en-US" sz="6400" b="1" dirty="0">
+                <a:solidFill>
+                  <a:srgbClr val="660033"/>
+                </a:solidFill>
+                <a:latin typeface="Microsoft JhengHei" panose="020B0604030504040204" pitchFamily="34" charset="-120"/>
+                <a:ea typeface="Microsoft JhengHei" panose="020B0604030504040204" pitchFamily="34" charset="-120"/>
+              </a:rPr>
+              <a:t>袮</a:t>
+            </a:r>
+            <a:r>
+              <a:rPr lang="zh-TW" altLang="en-US" sz="6400" b="1" dirty="0">
+                <a:solidFill>
+                  <a:srgbClr val="660033"/>
+                </a:solidFill>
+                <a:latin typeface="Microsoft JhengHei" panose="020B0604030504040204" pitchFamily="34" charset="-120"/>
+                <a:ea typeface="Microsoft JhengHei" panose="020B0604030504040204" pitchFamily="34" charset="-120"/>
+              </a:rPr>
+              <a:t>永遠不改變</a:t>
+            </a:r>
+            <a:endParaRPr lang="en-US" altLang="zh-TW" sz="6400" b="1" dirty="0">
+              <a:solidFill>
+                <a:srgbClr val="660033"/>
+              </a:solidFill>
+              <a:latin typeface="Microsoft JhengHei" panose="020B0604030504040204" pitchFamily="34" charset="-120"/>
+              <a:ea typeface="Microsoft JhengHei" panose="020B0604030504040204" pitchFamily="34" charset="-120"/>
+            </a:endParaRPr>
+          </a:p>
+          <a:p>
+            <a:pPr marL="0" indent="0" algn="ctr">
+              <a:buNone/>
+            </a:pPr>
+            <a:r>
+              <a:rPr lang="zh-TW" altLang="en-US" sz="6400" b="1" dirty="0">
+                <a:solidFill>
+                  <a:srgbClr val="660033"/>
+                </a:solidFill>
+                <a:latin typeface="Microsoft JhengHei" panose="020B0604030504040204" pitchFamily="34" charset="-120"/>
+                <a:ea typeface="Microsoft JhengHei" panose="020B0604030504040204" pitchFamily="34" charset="-120"/>
+              </a:rPr>
+              <a:t>信實的神</a:t>
+            </a:r>
+            <a:r>
+              <a:rPr lang="zh-CN" altLang="en-US" sz="6400" b="1" dirty="0">
+                <a:solidFill>
+                  <a:srgbClr val="660033"/>
+                </a:solidFill>
+                <a:latin typeface="Microsoft JhengHei" panose="020B0604030504040204" pitchFamily="34" charset="-120"/>
+                <a:ea typeface="Microsoft JhengHei" panose="020B0604030504040204" pitchFamily="34" charset="-120"/>
+              </a:rPr>
+              <a:t>袮</a:t>
+            </a:r>
+            <a:r>
+              <a:rPr lang="zh-TW" altLang="en-US" sz="6400" b="1" dirty="0">
+                <a:solidFill>
+                  <a:srgbClr val="660033"/>
+                </a:solidFill>
+                <a:latin typeface="Microsoft JhengHei" panose="020B0604030504040204" pitchFamily="34" charset="-120"/>
+                <a:ea typeface="Microsoft JhengHei" panose="020B0604030504040204" pitchFamily="34" charset="-120"/>
+              </a:rPr>
+              <a:t>永遠不改變</a:t>
+            </a:r>
+            <a:endParaRPr lang="en-US" altLang="zh-TW" sz="6400" b="1" dirty="0">
+              <a:solidFill>
+                <a:srgbClr val="660033"/>
+              </a:solidFill>
+              <a:latin typeface="Microsoft JhengHei" panose="020B0604030504040204" pitchFamily="34" charset="-120"/>
+              <a:ea typeface="Microsoft JhengHei" panose="020B0604030504040204" pitchFamily="34" charset="-120"/>
+            </a:endParaRPr>
+          </a:p>
+        </p:txBody>
+      </p:sp>
+      <p:sp>
+        <p:nvSpPr>
+          <p:cNvPr id="3" name="TextBox 2"/>
+          <p:cNvSpPr txBox="1"/>
+          <p:nvPr/>
+        </p:nvSpPr>
+        <p:spPr>
+          <a:xfrm>
+            <a:off x="178" y="5373218"/>
+            <a:ext cx="12191823" cy="769441"/>
+          </a:xfrm>
+          <a:prstGeom prst="rect">
+            <a:avLst/>
+          </a:prstGeom>
+          <a:noFill/>
+        </p:spPr>
+        <p:txBody>
+          <a:bodyPr wrap="square" rtlCol="0" anchor="ctr">
+            <a:spAutoFit/>
+          </a:bodyPr>
+          <a:lstStyle/>
+          <a:p>
+            <a:pPr algn="ctr"/>
+            <a:r>
+              <a:rPr lang="en-US" sz="4400" b="1" dirty="0">
+                <a:solidFill>
+                  <a:srgbClr val="660033"/>
+                </a:solidFill>
+                <a:effectLst/>
+                <a:latin typeface="Microsoft JhengHei" panose="020B0604030504040204" pitchFamily="34" charset="-120"/>
+                <a:ea typeface="Microsoft JhengHei" panose="020B0604030504040204" pitchFamily="34" charset="-120"/>
+              </a:rPr>
+              <a:t>( </a:t>
+            </a:r>
+            <a:r>
+              <a:rPr lang="zh-CN" altLang="en-US" sz="4400" b="1" dirty="0">
+                <a:solidFill>
+                  <a:srgbClr val="660033"/>
+                </a:solidFill>
+                <a:effectLst/>
+                <a:latin typeface="Microsoft JhengHei" panose="020B0604030504040204" pitchFamily="34" charset="-120"/>
+                <a:ea typeface="Microsoft JhengHei" panose="020B0604030504040204" pitchFamily="34" charset="-120"/>
+              </a:rPr>
+              <a:t>正</a:t>
+            </a:r>
+            <a:r>
+              <a:rPr lang="en-US" sz="4400" b="1" dirty="0">
+                <a:solidFill>
+                  <a:srgbClr val="660033"/>
+                </a:solidFill>
+                <a:effectLst/>
+                <a:latin typeface="Microsoft JhengHei" panose="020B0604030504040204" pitchFamily="34" charset="-120"/>
+                <a:ea typeface="Microsoft JhengHei" panose="020B0604030504040204" pitchFamily="34" charset="-120"/>
+              </a:rPr>
+              <a:t> )</a:t>
+            </a:r>
+            <a:endParaRPr lang="vi-VN" sz="4400" b="1" dirty="0">
+              <a:solidFill>
+                <a:srgbClr val="660033"/>
+              </a:solidFill>
+              <a:effectLst/>
+              <a:ea typeface="Microsoft JhengHei" panose="020B0604030504040204" pitchFamily="34" charset="-120"/>
+            </a:endParaRPr>
+          </a:p>
+        </p:txBody>
+      </p:sp>
+    </p:spTree>
+    <p:extLst>
+      <p:ext uri="{BB962C8B-B14F-4D97-AF65-F5344CB8AC3E}">
+        <p14:creationId xmlns:p14="http://schemas.microsoft.com/office/powerpoint/2010/main" xmlns="" val="1872291190"/>
+      </p:ext>
+    </p:extLst>
+  </p:cSld>
+  <p:clrMapOvr>
+    <a:masterClrMapping/>
+  </p:clrMapOvr>
+</p:sld>
+</file>
+
+<file path=ppt/slides/slide16.xml><?xml version="1.0" encoding="utf-8"?>
+<p:sld xmlns:a="http://schemas.openxmlformats.org/drawingml/2006/main" xmlns:r="http://schemas.openxmlformats.org/officeDocument/2006/relationships" xmlns:p="http://schemas.openxmlformats.org/presentationml/2006/main">
+  <p:cSld>
+    <p:spTree>
+      <p:nvGrpSpPr>
+        <p:cNvPr id="1" name=""/>
+        <p:cNvGrpSpPr/>
+        <p:nvPr/>
+      </p:nvGrpSpPr>
+      <p:grpSpPr>
+        <a:xfrm>
+          <a:off x="0" y="0"/>
+          <a:ext cx="0" cy="0"/>
+          <a:chOff x="0" y="0"/>
+          <a:chExt cx="0" cy="0"/>
+        </a:xfrm>
+      </p:grpSpPr>
+      <p:sp>
+        <p:nvSpPr>
+          <p:cNvPr id="5" name="內容版面配置區 4"/>
+          <p:cNvSpPr>
+            <a:spLocks noGrp="1"/>
+          </p:cNvSpPr>
+          <p:nvPr>
+            <p:ph idx="1"/>
+          </p:nvPr>
+        </p:nvSpPr>
+        <p:spPr>
+          <a:xfrm>
+            <a:off x="0" y="2084851"/>
+            <a:ext cx="12192000" cy="2404863"/>
+          </a:xfrm>
+        </p:spPr>
+        <p:txBody>
+          <a:bodyPr anchor="ctr">
+            <a:normAutofit/>
+          </a:bodyPr>
+          <a:lstStyle/>
+          <a:p>
+            <a:pPr marL="0" indent="0" algn="ctr">
+              <a:buNone/>
+            </a:pPr>
+            <a:r>
+              <a:rPr lang="zh-TW" altLang="en-US" sz="6400" b="1" dirty="0">
+                <a:solidFill>
+                  <a:srgbClr val="660033"/>
+                </a:solidFill>
+                <a:latin typeface="Microsoft JhengHei" panose="020B0604030504040204" pitchFamily="34" charset="-120"/>
+                <a:ea typeface="Microsoft JhengHei" panose="020B0604030504040204" pitchFamily="34" charset="-120"/>
+              </a:rPr>
+              <a:t>依靠耶和華的人好像錫安山</a:t>
+            </a:r>
+            <a:endParaRPr lang="en-US" altLang="zh-TW" sz="6400" b="1" dirty="0">
+              <a:solidFill>
+                <a:srgbClr val="660033"/>
+              </a:solidFill>
+              <a:latin typeface="Microsoft JhengHei" panose="020B0604030504040204" pitchFamily="34" charset="-120"/>
+              <a:ea typeface="Microsoft JhengHei" panose="020B0604030504040204" pitchFamily="34" charset="-120"/>
+            </a:endParaRPr>
+          </a:p>
+          <a:p>
+            <a:pPr marL="0" indent="0" algn="ctr">
+              <a:buNone/>
+            </a:pPr>
+            <a:r>
+              <a:rPr lang="zh-TW" altLang="en-US" sz="6400" b="1" dirty="0">
+                <a:solidFill>
+                  <a:srgbClr val="660033"/>
+                </a:solidFill>
+                <a:latin typeface="Microsoft JhengHei" panose="020B0604030504040204" pitchFamily="34" charset="-120"/>
+                <a:ea typeface="Microsoft JhengHei" panose="020B0604030504040204" pitchFamily="34" charset="-120"/>
+              </a:rPr>
+              <a:t>哈利路亞  永不動搖</a:t>
+            </a:r>
+            <a:endParaRPr lang="vi-VN" sz="6400" b="1" dirty="0">
+              <a:solidFill>
+                <a:srgbClr val="660033"/>
+              </a:solidFill>
+              <a:ea typeface="Microsoft JhengHei" panose="020B0604030504040204" pitchFamily="34" charset="-120"/>
+            </a:endParaRPr>
+          </a:p>
+        </p:txBody>
+      </p:sp>
+      <p:sp>
+        <p:nvSpPr>
+          <p:cNvPr id="3" name="TextBox 2"/>
+          <p:cNvSpPr txBox="1"/>
+          <p:nvPr/>
+        </p:nvSpPr>
+        <p:spPr>
+          <a:xfrm>
+            <a:off x="178" y="5373218"/>
+            <a:ext cx="12191823" cy="769441"/>
+          </a:xfrm>
+          <a:prstGeom prst="rect">
+            <a:avLst/>
+          </a:prstGeom>
+          <a:noFill/>
+        </p:spPr>
+        <p:txBody>
+          <a:bodyPr wrap="square" rtlCol="0" anchor="ctr">
+            <a:spAutoFit/>
+          </a:bodyPr>
+          <a:lstStyle/>
+          <a:p>
+            <a:pPr algn="ctr"/>
+            <a:r>
+              <a:rPr lang="en-US" sz="4400" b="1" dirty="0">
+                <a:solidFill>
+                  <a:srgbClr val="660033"/>
+                </a:solidFill>
+                <a:effectLst/>
+                <a:latin typeface="Microsoft JhengHei" panose="020B0604030504040204" pitchFamily="34" charset="-120"/>
+                <a:ea typeface="Microsoft JhengHei" panose="020B0604030504040204" pitchFamily="34" charset="-120"/>
+              </a:rPr>
+              <a:t>( </a:t>
+            </a:r>
+            <a:r>
+              <a:rPr lang="zh-CN" altLang="en-US" sz="4400" b="1" dirty="0">
+                <a:solidFill>
+                  <a:srgbClr val="660033"/>
+                </a:solidFill>
+                <a:effectLst/>
+                <a:latin typeface="Microsoft JhengHei" panose="020B0604030504040204" pitchFamily="34" charset="-120"/>
+                <a:ea typeface="Microsoft JhengHei" panose="020B0604030504040204" pitchFamily="34" charset="-120"/>
+              </a:rPr>
+              <a:t>正</a:t>
+            </a:r>
+            <a:r>
+              <a:rPr lang="en-US" sz="4400" b="1" dirty="0">
+                <a:solidFill>
+                  <a:srgbClr val="660033"/>
+                </a:solidFill>
+                <a:effectLst/>
+                <a:latin typeface="Microsoft JhengHei" panose="020B0604030504040204" pitchFamily="34" charset="-120"/>
+                <a:ea typeface="Microsoft JhengHei" panose="020B0604030504040204" pitchFamily="34" charset="-120"/>
+              </a:rPr>
+              <a:t> )</a:t>
+            </a:r>
+            <a:endParaRPr lang="vi-VN" sz="4400" b="1" dirty="0">
+              <a:solidFill>
+                <a:srgbClr val="660033"/>
+              </a:solidFill>
+              <a:effectLst/>
+              <a:ea typeface="Microsoft JhengHei" panose="020B0604030504040204" pitchFamily="34" charset="-120"/>
+            </a:endParaRPr>
+          </a:p>
+        </p:txBody>
+      </p:sp>
+    </p:spTree>
+    <p:extLst>
+      <p:ext uri="{BB962C8B-B14F-4D97-AF65-F5344CB8AC3E}">
+        <p14:creationId xmlns:p14="http://schemas.microsoft.com/office/powerpoint/2010/main" xmlns="" val="2071030861"/>
+      </p:ext>
+    </p:extLst>
+  </p:cSld>
+  <p:clrMapOvr>
+    <a:masterClrMapping/>
+  </p:clrMapOvr>
+</p:sld>
+</file>
+
+<file path=ppt/slides/slide17.xml><?xml version="1.0" encoding="utf-8"?>
+<p:sld xmlns:a="http://schemas.openxmlformats.org/drawingml/2006/main" xmlns:r="http://schemas.openxmlformats.org/officeDocument/2006/relationships" xmlns:p="http://schemas.openxmlformats.org/presentationml/2006/main">
+  <p:cSld>
+    <p:spTree>
+      <p:nvGrpSpPr>
+        <p:cNvPr id="1" name=""/>
+        <p:cNvGrpSpPr/>
+        <p:nvPr/>
+      </p:nvGrpSpPr>
+      <p:grpSpPr>
+        <a:xfrm>
+          <a:off x="0" y="0"/>
+          <a:ext cx="0" cy="0"/>
+          <a:chOff x="0" y="0"/>
+          <a:chExt cx="0" cy="0"/>
+        </a:xfrm>
+      </p:grpSpPr>
+      <p:sp>
+        <p:nvSpPr>
+          <p:cNvPr id="5" name="內容版面配置區 4"/>
+          <p:cNvSpPr>
+            <a:spLocks noGrp="1"/>
+          </p:cNvSpPr>
+          <p:nvPr>
+            <p:ph idx="1"/>
+          </p:nvPr>
+        </p:nvSpPr>
+        <p:spPr>
+          <a:xfrm>
+            <a:off x="0" y="2084851"/>
+            <a:ext cx="12192000" cy="2404863"/>
+          </a:xfrm>
+        </p:spPr>
+        <p:txBody>
+          <a:bodyPr anchor="ctr">
+            <a:normAutofit/>
+          </a:bodyPr>
+          <a:lstStyle/>
+          <a:p>
+            <a:pPr marL="0" indent="0" algn="ctr">
+              <a:buNone/>
+            </a:pPr>
+            <a:r>
+              <a:rPr lang="zh-TW" altLang="en-US" sz="6400" b="1" dirty="0">
+                <a:solidFill>
+                  <a:srgbClr val="660033"/>
+                </a:solidFill>
+                <a:latin typeface="Microsoft JhengHei" panose="020B0604030504040204" pitchFamily="34" charset="-120"/>
+                <a:ea typeface="Microsoft JhengHei" panose="020B0604030504040204" pitchFamily="34" charset="-120"/>
+              </a:rPr>
+              <a:t>祂的應許永不改變不落空</a:t>
+            </a:r>
+            <a:endParaRPr lang="en-US" altLang="zh-TW" sz="6400" b="1" dirty="0">
+              <a:solidFill>
+                <a:srgbClr val="660033"/>
+              </a:solidFill>
+              <a:latin typeface="Microsoft JhengHei" panose="020B0604030504040204" pitchFamily="34" charset="-120"/>
+              <a:ea typeface="Microsoft JhengHei" panose="020B0604030504040204" pitchFamily="34" charset="-120"/>
+            </a:endParaRPr>
+          </a:p>
+          <a:p>
+            <a:pPr marL="0" indent="0" algn="ctr">
+              <a:buNone/>
+            </a:pPr>
+            <a:r>
+              <a:rPr lang="zh-TW" altLang="en-US" sz="6400" b="1" dirty="0">
+                <a:solidFill>
+                  <a:srgbClr val="660033"/>
+                </a:solidFill>
+                <a:latin typeface="Microsoft JhengHei" panose="020B0604030504040204" pitchFamily="34" charset="-120"/>
+                <a:ea typeface="Microsoft JhengHei" panose="020B0604030504040204" pitchFamily="34" charset="-120"/>
+              </a:rPr>
+              <a:t>眾山怎樣圍繞耶路撒冷</a:t>
+            </a:r>
+            <a:endParaRPr lang="en-US" altLang="zh-TW" sz="6400" b="1" dirty="0">
+              <a:solidFill>
+                <a:srgbClr val="660033"/>
+              </a:solidFill>
+              <a:latin typeface="Microsoft JhengHei" panose="020B0604030504040204" pitchFamily="34" charset="-120"/>
+              <a:ea typeface="Microsoft JhengHei" panose="020B0604030504040204" pitchFamily="34" charset="-120"/>
+            </a:endParaRPr>
+          </a:p>
+        </p:txBody>
+      </p:sp>
+      <p:sp>
+        <p:nvSpPr>
+          <p:cNvPr id="3" name="TextBox 2"/>
+          <p:cNvSpPr txBox="1"/>
+          <p:nvPr/>
+        </p:nvSpPr>
+        <p:spPr>
+          <a:xfrm>
+            <a:off x="178" y="5373218"/>
+            <a:ext cx="12191823" cy="769441"/>
+          </a:xfrm>
+          <a:prstGeom prst="rect">
+            <a:avLst/>
+          </a:prstGeom>
+          <a:noFill/>
+        </p:spPr>
+        <p:txBody>
+          <a:bodyPr wrap="square" rtlCol="0" anchor="ctr">
+            <a:spAutoFit/>
+          </a:bodyPr>
+          <a:lstStyle/>
+          <a:p>
+            <a:pPr algn="ctr"/>
+            <a:r>
+              <a:rPr lang="en-US" sz="4400" b="1" dirty="0">
+                <a:solidFill>
+                  <a:srgbClr val="660033"/>
+                </a:solidFill>
+                <a:effectLst/>
+                <a:latin typeface="Microsoft JhengHei" panose="020B0604030504040204" pitchFamily="34" charset="-120"/>
+                <a:ea typeface="Microsoft JhengHei" panose="020B0604030504040204" pitchFamily="34" charset="-120"/>
+              </a:rPr>
+              <a:t>( </a:t>
+            </a:r>
+            <a:r>
+              <a:rPr lang="zh-CN" altLang="en-US" sz="4400" b="1" dirty="0">
+                <a:solidFill>
+                  <a:srgbClr val="660033"/>
+                </a:solidFill>
+                <a:effectLst/>
+                <a:latin typeface="Microsoft JhengHei" panose="020B0604030504040204" pitchFamily="34" charset="-120"/>
+                <a:ea typeface="Microsoft JhengHei" panose="020B0604030504040204" pitchFamily="34" charset="-120"/>
+              </a:rPr>
+              <a:t>副</a:t>
+            </a:r>
+            <a:r>
+              <a:rPr lang="en-US" sz="4400" b="1" dirty="0">
+                <a:solidFill>
+                  <a:srgbClr val="660033"/>
+                </a:solidFill>
+                <a:effectLst/>
+                <a:latin typeface="Microsoft JhengHei" panose="020B0604030504040204" pitchFamily="34" charset="-120"/>
+                <a:ea typeface="Microsoft JhengHei" panose="020B0604030504040204" pitchFamily="34" charset="-120"/>
+              </a:rPr>
+              <a:t> )</a:t>
+            </a:r>
+            <a:endParaRPr lang="vi-VN" sz="4400" b="1" dirty="0">
+              <a:solidFill>
+                <a:srgbClr val="660033"/>
+              </a:solidFill>
+              <a:effectLst/>
+              <a:ea typeface="Microsoft JhengHei" panose="020B0604030504040204" pitchFamily="34" charset="-120"/>
+            </a:endParaRPr>
+          </a:p>
+        </p:txBody>
+      </p:sp>
+    </p:spTree>
+    <p:extLst>
+      <p:ext uri="{BB962C8B-B14F-4D97-AF65-F5344CB8AC3E}">
+        <p14:creationId xmlns:p14="http://schemas.microsoft.com/office/powerpoint/2010/main" xmlns="" val="3850034681"/>
+      </p:ext>
+    </p:extLst>
+  </p:cSld>
+  <p:clrMapOvr>
+    <a:masterClrMapping/>
+  </p:clrMapOvr>
+</p:sld>
+</file>
+
+<file path=ppt/slides/slide18.xml><?xml version="1.0" encoding="utf-8"?>
+<p:sld xmlns:a="http://schemas.openxmlformats.org/drawingml/2006/main" xmlns:r="http://schemas.openxmlformats.org/officeDocument/2006/relationships" xmlns:p="http://schemas.openxmlformats.org/presentationml/2006/main">
+  <p:cSld>
+    <p:spTree>
+      <p:nvGrpSpPr>
+        <p:cNvPr id="1" name=""/>
+        <p:cNvGrpSpPr/>
+        <p:nvPr/>
+      </p:nvGrpSpPr>
+      <p:grpSpPr>
+        <a:xfrm>
+          <a:off x="0" y="0"/>
+          <a:ext cx="0" cy="0"/>
+          <a:chOff x="0" y="0"/>
+          <a:chExt cx="0" cy="0"/>
+        </a:xfrm>
+      </p:grpSpPr>
+      <p:sp>
+        <p:nvSpPr>
+          <p:cNvPr id="5" name="內容版面配置區 4"/>
+          <p:cNvSpPr>
+            <a:spLocks noGrp="1"/>
+          </p:cNvSpPr>
+          <p:nvPr>
+            <p:ph idx="1"/>
+          </p:nvPr>
+        </p:nvSpPr>
+        <p:spPr>
+          <a:xfrm>
+            <a:off x="0" y="2084851"/>
+            <a:ext cx="12192000" cy="2404863"/>
+          </a:xfrm>
+        </p:spPr>
+        <p:txBody>
+          <a:bodyPr anchor="ctr">
+            <a:normAutofit/>
+          </a:bodyPr>
+          <a:lstStyle/>
+          <a:p>
+            <a:pPr marL="0" indent="0" algn="ctr">
+              <a:buNone/>
+            </a:pPr>
+            <a:r>
+              <a:rPr lang="zh-TW" altLang="en-US" sz="6400" b="1" dirty="0">
+                <a:solidFill>
+                  <a:srgbClr val="660033"/>
+                </a:solidFill>
+                <a:latin typeface="Microsoft JhengHei" panose="020B0604030504040204" pitchFamily="34" charset="-120"/>
+                <a:ea typeface="Microsoft JhengHei" panose="020B0604030504040204" pitchFamily="34" charset="-120"/>
+              </a:rPr>
+              <a:t>耶和華也照樣圍繞我們</a:t>
+            </a:r>
+            <a:endParaRPr lang="en-US" altLang="zh-TW" sz="6400" b="1" dirty="0">
+              <a:solidFill>
+                <a:srgbClr val="660033"/>
+              </a:solidFill>
+              <a:latin typeface="Microsoft JhengHei" panose="020B0604030504040204" pitchFamily="34" charset="-120"/>
+              <a:ea typeface="Microsoft JhengHei" panose="020B0604030504040204" pitchFamily="34" charset="-120"/>
+            </a:endParaRPr>
+          </a:p>
+          <a:p>
+            <a:pPr marL="0" indent="0" algn="ctr">
+              <a:buNone/>
+            </a:pPr>
+            <a:r>
+              <a:rPr lang="zh-TW" altLang="en-US" sz="6400" b="1" dirty="0">
+                <a:solidFill>
+                  <a:srgbClr val="660033"/>
+                </a:solidFill>
+                <a:latin typeface="Microsoft JhengHei" panose="020B0604030504040204" pitchFamily="34" charset="-120"/>
+                <a:ea typeface="Microsoft JhengHei" panose="020B0604030504040204" pitchFamily="34" charset="-120"/>
+              </a:rPr>
+              <a:t>從今時直到永遠</a:t>
+            </a:r>
+            <a:endParaRPr lang="vi-VN" sz="6400" b="1" dirty="0">
+              <a:solidFill>
+                <a:srgbClr val="660033"/>
+              </a:solidFill>
+              <a:latin typeface="Microsoft JhengHei" panose="020B0604030504040204" pitchFamily="34" charset="-120"/>
+              <a:ea typeface="Microsoft JhengHei" panose="020B0604030504040204" pitchFamily="34" charset="-120"/>
+            </a:endParaRPr>
+          </a:p>
+        </p:txBody>
+      </p:sp>
+      <p:sp>
+        <p:nvSpPr>
+          <p:cNvPr id="3" name="TextBox 2"/>
+          <p:cNvSpPr txBox="1"/>
+          <p:nvPr/>
+        </p:nvSpPr>
+        <p:spPr>
+          <a:xfrm>
+            <a:off x="178" y="5373218"/>
+            <a:ext cx="12191823" cy="769441"/>
+          </a:xfrm>
+          <a:prstGeom prst="rect">
+            <a:avLst/>
+          </a:prstGeom>
+          <a:noFill/>
+        </p:spPr>
+        <p:txBody>
+          <a:bodyPr wrap="square" rtlCol="0" anchor="ctr">
+            <a:spAutoFit/>
+          </a:bodyPr>
+          <a:lstStyle/>
+          <a:p>
+            <a:pPr algn="ctr"/>
+            <a:r>
+              <a:rPr lang="en-US" sz="4400" b="1" dirty="0">
+                <a:solidFill>
+                  <a:srgbClr val="660033"/>
+                </a:solidFill>
+                <a:effectLst/>
+                <a:latin typeface="Microsoft JhengHei" panose="020B0604030504040204" pitchFamily="34" charset="-120"/>
+                <a:ea typeface="Microsoft JhengHei" panose="020B0604030504040204" pitchFamily="34" charset="-120"/>
+              </a:rPr>
+              <a:t>( </a:t>
+            </a:r>
+            <a:r>
+              <a:rPr lang="zh-CN" altLang="en-US" sz="4400" b="1" dirty="0">
+                <a:solidFill>
+                  <a:srgbClr val="660033"/>
+                </a:solidFill>
+                <a:effectLst/>
+                <a:latin typeface="Microsoft JhengHei" panose="020B0604030504040204" pitchFamily="34" charset="-120"/>
+                <a:ea typeface="Microsoft JhengHei" panose="020B0604030504040204" pitchFamily="34" charset="-120"/>
+              </a:rPr>
+              <a:t>副</a:t>
+            </a:r>
+            <a:r>
+              <a:rPr lang="en-US" sz="4400" b="1" dirty="0">
+                <a:solidFill>
+                  <a:srgbClr val="660033"/>
+                </a:solidFill>
+                <a:effectLst/>
+                <a:latin typeface="Microsoft JhengHei" panose="020B0604030504040204" pitchFamily="34" charset="-120"/>
+                <a:ea typeface="Microsoft JhengHei" panose="020B0604030504040204" pitchFamily="34" charset="-120"/>
+              </a:rPr>
+              <a:t> )</a:t>
+            </a:r>
+            <a:endParaRPr lang="vi-VN" sz="4400" b="1" dirty="0">
+              <a:solidFill>
+                <a:srgbClr val="660033"/>
+              </a:solidFill>
+              <a:effectLst/>
+              <a:ea typeface="Microsoft JhengHei" panose="020B0604030504040204" pitchFamily="34" charset="-120"/>
+            </a:endParaRPr>
+          </a:p>
+        </p:txBody>
+      </p:sp>
+    </p:spTree>
+    <p:extLst>
+      <p:ext uri="{BB962C8B-B14F-4D97-AF65-F5344CB8AC3E}">
+        <p14:creationId xmlns:p14="http://schemas.microsoft.com/office/powerpoint/2010/main" xmlns="" val="254690880"/>
+      </p:ext>
+    </p:extLst>
+  </p:cSld>
+  <p:clrMapOvr>
+    <a:masterClrMapping/>
+  </p:clrMapOvr>
+</p:sld>
+</file>
+
+<file path=ppt/slides/slide19.xml><?xml version="1.0" encoding="utf-8"?>
+<p:sld xmlns:a="http://schemas.openxmlformats.org/drawingml/2006/main" xmlns:r="http://schemas.openxmlformats.org/officeDocument/2006/relationships" xmlns:p="http://schemas.openxmlformats.org/presentationml/2006/main">
+  <p:cSld>
+    <p:spTree>
+      <p:nvGrpSpPr>
+        <p:cNvPr id="1" name=""/>
+        <p:cNvGrpSpPr/>
+        <p:nvPr/>
+      </p:nvGrpSpPr>
+      <p:grpSpPr>
+        <a:xfrm>
+          <a:off x="0" y="0"/>
+          <a:ext cx="0" cy="0"/>
+          <a:chOff x="0" y="0"/>
+          <a:chExt cx="0" cy="0"/>
+        </a:xfrm>
+      </p:grpSpPr>
+      <p:sp>
+        <p:nvSpPr>
+          <p:cNvPr id="5" name="內容版面配置區 4"/>
+          <p:cNvSpPr>
+            <a:spLocks noGrp="1"/>
+          </p:cNvSpPr>
+          <p:nvPr>
+            <p:ph idx="1"/>
+          </p:nvPr>
+        </p:nvSpPr>
+        <p:spPr>
+          <a:xfrm>
+            <a:off x="0" y="2084851"/>
+            <a:ext cx="12192000" cy="2404863"/>
+          </a:xfrm>
+        </p:spPr>
+        <p:txBody>
+          <a:bodyPr anchor="ctr">
+            <a:normAutofit/>
+          </a:bodyPr>
+          <a:lstStyle/>
+          <a:p>
+            <a:pPr marL="0" indent="0" algn="ctr">
+              <a:buNone/>
+            </a:pPr>
+            <a:r>
+              <a:rPr lang="zh-TW" altLang="en-US" sz="6400" b="1" dirty="0">
+                <a:solidFill>
+                  <a:srgbClr val="660033"/>
+                </a:solidFill>
+                <a:latin typeface="Microsoft JhengHei" panose="020B0604030504040204" pitchFamily="34" charset="-120"/>
+                <a:ea typeface="Microsoft JhengHei" panose="020B0604030504040204" pitchFamily="34" charset="-120"/>
+              </a:rPr>
+              <a:t>祂的應許永不改變不落空</a:t>
+            </a:r>
+            <a:endParaRPr lang="en-US" altLang="zh-TW" sz="6400" b="1" dirty="0">
+              <a:solidFill>
+                <a:srgbClr val="660033"/>
+              </a:solidFill>
+              <a:latin typeface="Microsoft JhengHei" panose="020B0604030504040204" pitchFamily="34" charset="-120"/>
+              <a:ea typeface="Microsoft JhengHei" panose="020B0604030504040204" pitchFamily="34" charset="-120"/>
+            </a:endParaRPr>
+          </a:p>
+          <a:p>
+            <a:pPr marL="0" indent="0" algn="ctr">
+              <a:buNone/>
+            </a:pPr>
+            <a:r>
+              <a:rPr lang="zh-TW" altLang="en-US" sz="6400" b="1" dirty="0">
+                <a:solidFill>
+                  <a:srgbClr val="660033"/>
+                </a:solidFill>
+                <a:latin typeface="Microsoft JhengHei" panose="020B0604030504040204" pitchFamily="34" charset="-120"/>
+                <a:ea typeface="Microsoft JhengHei" panose="020B0604030504040204" pitchFamily="34" charset="-120"/>
+              </a:rPr>
+              <a:t>眾山怎樣圍繞耶路撒冷</a:t>
+            </a:r>
+            <a:endParaRPr lang="en-US" altLang="zh-TW" sz="6400" b="1" dirty="0">
+              <a:solidFill>
+                <a:srgbClr val="660033"/>
+              </a:solidFill>
+              <a:latin typeface="Microsoft JhengHei" panose="020B0604030504040204" pitchFamily="34" charset="-120"/>
+              <a:ea typeface="Microsoft JhengHei" panose="020B0604030504040204" pitchFamily="34" charset="-120"/>
+            </a:endParaRPr>
+          </a:p>
+        </p:txBody>
+      </p:sp>
+      <p:sp>
+        <p:nvSpPr>
+          <p:cNvPr id="3" name="TextBox 2"/>
+          <p:cNvSpPr txBox="1"/>
+          <p:nvPr/>
+        </p:nvSpPr>
+        <p:spPr>
+          <a:xfrm>
+            <a:off x="178" y="5373218"/>
+            <a:ext cx="12191823" cy="769441"/>
+          </a:xfrm>
+          <a:prstGeom prst="rect">
+            <a:avLst/>
+          </a:prstGeom>
+          <a:noFill/>
+        </p:spPr>
+        <p:txBody>
+          <a:bodyPr wrap="square" rtlCol="0" anchor="ctr">
+            <a:spAutoFit/>
+          </a:bodyPr>
+          <a:lstStyle/>
+          <a:p>
+            <a:pPr algn="ctr"/>
+            <a:r>
+              <a:rPr lang="en-US" sz="4400" b="1" dirty="0">
+                <a:solidFill>
+                  <a:srgbClr val="660033"/>
+                </a:solidFill>
+                <a:effectLst/>
+                <a:latin typeface="Microsoft JhengHei" panose="020B0604030504040204" pitchFamily="34" charset="-120"/>
+                <a:ea typeface="Microsoft JhengHei" panose="020B0604030504040204" pitchFamily="34" charset="-120"/>
+              </a:rPr>
+              <a:t>( </a:t>
+            </a:r>
+            <a:r>
+              <a:rPr lang="zh-CN" altLang="en-US" sz="4400" b="1" dirty="0">
+                <a:solidFill>
+                  <a:srgbClr val="660033"/>
+                </a:solidFill>
+                <a:effectLst/>
+                <a:latin typeface="Microsoft JhengHei" panose="020B0604030504040204" pitchFamily="34" charset="-120"/>
+                <a:ea typeface="Microsoft JhengHei" panose="020B0604030504040204" pitchFamily="34" charset="-120"/>
+              </a:rPr>
+              <a:t>副</a:t>
+            </a:r>
+            <a:r>
+              <a:rPr lang="en-US" sz="4400" b="1" dirty="0">
+                <a:solidFill>
+                  <a:srgbClr val="660033"/>
+                </a:solidFill>
+                <a:effectLst/>
+                <a:latin typeface="Microsoft JhengHei" panose="020B0604030504040204" pitchFamily="34" charset="-120"/>
+                <a:ea typeface="Microsoft JhengHei" panose="020B0604030504040204" pitchFamily="34" charset="-120"/>
+              </a:rPr>
+              <a:t> )</a:t>
+            </a:r>
+            <a:endParaRPr lang="vi-VN" sz="4400" b="1" dirty="0">
+              <a:solidFill>
+                <a:srgbClr val="660033"/>
+              </a:solidFill>
+              <a:effectLst/>
+              <a:ea typeface="Microsoft JhengHei" panose="020B0604030504040204" pitchFamily="34" charset="-120"/>
+            </a:endParaRPr>
+          </a:p>
+        </p:txBody>
+      </p:sp>
+    </p:spTree>
+    <p:extLst>
+      <p:ext uri="{BB962C8B-B14F-4D97-AF65-F5344CB8AC3E}">
+        <p14:creationId xmlns:p14="http://schemas.microsoft.com/office/powerpoint/2010/main" xmlns="" val="3850034681"/>
       </p:ext>
     </p:extLst>
   </p:cSld>
@@ -3392,7 +5046,341 @@
     </p:spTree>
     <p:extLst>
       <p:ext uri="{BB962C8B-B14F-4D97-AF65-F5344CB8AC3E}">
-        <p14:creationId xmlns:p14="http://schemas.microsoft.com/office/powerpoint/2010/main" val="1872291190"/>
+        <p14:creationId xmlns:p14="http://schemas.microsoft.com/office/powerpoint/2010/main" xmlns="" val="1872291190"/>
+      </p:ext>
+    </p:extLst>
+  </p:cSld>
+  <p:clrMapOvr>
+    <a:masterClrMapping/>
+  </p:clrMapOvr>
+</p:sld>
+</file>
+
+<file path=ppt/slides/slide20.xml><?xml version="1.0" encoding="utf-8"?>
+<p:sld xmlns:a="http://schemas.openxmlformats.org/drawingml/2006/main" xmlns:r="http://schemas.openxmlformats.org/officeDocument/2006/relationships" xmlns:p="http://schemas.openxmlformats.org/presentationml/2006/main">
+  <p:cSld>
+    <p:spTree>
+      <p:nvGrpSpPr>
+        <p:cNvPr id="1" name=""/>
+        <p:cNvGrpSpPr/>
+        <p:nvPr/>
+      </p:nvGrpSpPr>
+      <p:grpSpPr>
+        <a:xfrm>
+          <a:off x="0" y="0"/>
+          <a:ext cx="0" cy="0"/>
+          <a:chOff x="0" y="0"/>
+          <a:chExt cx="0" cy="0"/>
+        </a:xfrm>
+      </p:grpSpPr>
+      <p:sp>
+        <p:nvSpPr>
+          <p:cNvPr id="5" name="內容版面配置區 4"/>
+          <p:cNvSpPr>
+            <a:spLocks noGrp="1"/>
+          </p:cNvSpPr>
+          <p:nvPr>
+            <p:ph idx="1"/>
+          </p:nvPr>
+        </p:nvSpPr>
+        <p:spPr>
+          <a:xfrm>
+            <a:off x="0" y="2084851"/>
+            <a:ext cx="12192000" cy="2404863"/>
+          </a:xfrm>
+        </p:spPr>
+        <p:txBody>
+          <a:bodyPr anchor="ctr">
+            <a:normAutofit/>
+          </a:bodyPr>
+          <a:lstStyle/>
+          <a:p>
+            <a:pPr marL="0" indent="0" algn="ctr">
+              <a:buNone/>
+            </a:pPr>
+            <a:r>
+              <a:rPr lang="zh-TW" altLang="en-US" sz="6400" b="1" dirty="0">
+                <a:solidFill>
+                  <a:srgbClr val="660033"/>
+                </a:solidFill>
+                <a:latin typeface="Microsoft JhengHei" panose="020B0604030504040204" pitchFamily="34" charset="-120"/>
+                <a:ea typeface="Microsoft JhengHei" panose="020B0604030504040204" pitchFamily="34" charset="-120"/>
+              </a:rPr>
+              <a:t>耶和華也照樣圍繞我們</a:t>
+            </a:r>
+            <a:endParaRPr lang="en-US" altLang="zh-TW" sz="6400" b="1" dirty="0">
+              <a:solidFill>
+                <a:srgbClr val="660033"/>
+              </a:solidFill>
+              <a:latin typeface="Microsoft JhengHei" panose="020B0604030504040204" pitchFamily="34" charset="-120"/>
+              <a:ea typeface="Microsoft JhengHei" panose="020B0604030504040204" pitchFamily="34" charset="-120"/>
+            </a:endParaRPr>
+          </a:p>
+          <a:p>
+            <a:pPr marL="0" indent="0" algn="ctr">
+              <a:buNone/>
+            </a:pPr>
+            <a:r>
+              <a:rPr lang="zh-TW" altLang="en-US" sz="6400" b="1" dirty="0">
+                <a:solidFill>
+                  <a:srgbClr val="660033"/>
+                </a:solidFill>
+                <a:latin typeface="Microsoft JhengHei" panose="020B0604030504040204" pitchFamily="34" charset="-120"/>
+                <a:ea typeface="Microsoft JhengHei" panose="020B0604030504040204" pitchFamily="34" charset="-120"/>
+              </a:rPr>
+              <a:t>從今時直到永遠</a:t>
+            </a:r>
+            <a:endParaRPr lang="vi-VN" sz="6400" b="1" dirty="0">
+              <a:solidFill>
+                <a:srgbClr val="660033"/>
+              </a:solidFill>
+              <a:latin typeface="Microsoft JhengHei" panose="020B0604030504040204" pitchFamily="34" charset="-120"/>
+              <a:ea typeface="Microsoft JhengHei" panose="020B0604030504040204" pitchFamily="34" charset="-120"/>
+            </a:endParaRPr>
+          </a:p>
+        </p:txBody>
+      </p:sp>
+      <p:sp>
+        <p:nvSpPr>
+          <p:cNvPr id="3" name="TextBox 2"/>
+          <p:cNvSpPr txBox="1"/>
+          <p:nvPr/>
+        </p:nvSpPr>
+        <p:spPr>
+          <a:xfrm>
+            <a:off x="178" y="5373218"/>
+            <a:ext cx="12191823" cy="769441"/>
+          </a:xfrm>
+          <a:prstGeom prst="rect">
+            <a:avLst/>
+          </a:prstGeom>
+          <a:noFill/>
+        </p:spPr>
+        <p:txBody>
+          <a:bodyPr wrap="square" rtlCol="0" anchor="ctr">
+            <a:spAutoFit/>
+          </a:bodyPr>
+          <a:lstStyle/>
+          <a:p>
+            <a:pPr algn="ctr"/>
+            <a:r>
+              <a:rPr lang="en-US" sz="4400" b="1" dirty="0">
+                <a:solidFill>
+                  <a:srgbClr val="660033"/>
+                </a:solidFill>
+                <a:effectLst/>
+                <a:latin typeface="Microsoft JhengHei" panose="020B0604030504040204" pitchFamily="34" charset="-120"/>
+                <a:ea typeface="Microsoft JhengHei" panose="020B0604030504040204" pitchFamily="34" charset="-120"/>
+              </a:rPr>
+              <a:t>( </a:t>
+            </a:r>
+            <a:r>
+              <a:rPr lang="zh-CN" altLang="en-US" sz="4400" b="1" dirty="0">
+                <a:solidFill>
+                  <a:srgbClr val="660033"/>
+                </a:solidFill>
+                <a:effectLst/>
+                <a:latin typeface="Microsoft JhengHei" panose="020B0604030504040204" pitchFamily="34" charset="-120"/>
+                <a:ea typeface="Microsoft JhengHei" panose="020B0604030504040204" pitchFamily="34" charset="-120"/>
+              </a:rPr>
+              <a:t>副</a:t>
+            </a:r>
+            <a:r>
+              <a:rPr lang="en-US" sz="4400" b="1" dirty="0">
+                <a:solidFill>
+                  <a:srgbClr val="660033"/>
+                </a:solidFill>
+                <a:effectLst/>
+                <a:latin typeface="Microsoft JhengHei" panose="020B0604030504040204" pitchFamily="34" charset="-120"/>
+                <a:ea typeface="Microsoft JhengHei" panose="020B0604030504040204" pitchFamily="34" charset="-120"/>
+              </a:rPr>
+              <a:t> )</a:t>
+            </a:r>
+            <a:endParaRPr lang="vi-VN" sz="4400" b="1" dirty="0">
+              <a:solidFill>
+                <a:srgbClr val="660033"/>
+              </a:solidFill>
+              <a:effectLst/>
+              <a:ea typeface="Microsoft JhengHei" panose="020B0604030504040204" pitchFamily="34" charset="-120"/>
+            </a:endParaRPr>
+          </a:p>
+        </p:txBody>
+      </p:sp>
+    </p:spTree>
+    <p:extLst>
+      <p:ext uri="{BB962C8B-B14F-4D97-AF65-F5344CB8AC3E}">
+        <p14:creationId xmlns:p14="http://schemas.microsoft.com/office/powerpoint/2010/main" xmlns="" val="254690880"/>
+      </p:ext>
+    </p:extLst>
+  </p:cSld>
+  <p:clrMapOvr>
+    <a:masterClrMapping/>
+  </p:clrMapOvr>
+</p:sld>
+</file>
+
+<file path=ppt/slides/slide21.xml><?xml version="1.0" encoding="utf-8"?>
+<p:sld xmlns:a="http://schemas.openxmlformats.org/drawingml/2006/main" xmlns:r="http://schemas.openxmlformats.org/officeDocument/2006/relationships" xmlns:p="http://schemas.openxmlformats.org/presentationml/2006/main">
+  <p:cSld>
+    <p:spTree>
+      <p:nvGrpSpPr>
+        <p:cNvPr id="1" name=""/>
+        <p:cNvGrpSpPr/>
+        <p:nvPr/>
+      </p:nvGrpSpPr>
+      <p:grpSpPr>
+        <a:xfrm>
+          <a:off x="0" y="0"/>
+          <a:ext cx="0" cy="0"/>
+          <a:chOff x="0" y="0"/>
+          <a:chExt cx="0" cy="0"/>
+        </a:xfrm>
+      </p:grpSpPr>
+      <p:sp>
+        <p:nvSpPr>
+          <p:cNvPr id="5" name="內容版面配置區 4"/>
+          <p:cNvSpPr>
+            <a:spLocks noGrp="1"/>
+          </p:cNvSpPr>
+          <p:nvPr>
+            <p:ph idx="1"/>
+          </p:nvPr>
+        </p:nvSpPr>
+        <p:spPr>
+          <a:xfrm>
+            <a:off x="0" y="2084851"/>
+            <a:ext cx="12192000" cy="2404863"/>
+          </a:xfrm>
+        </p:spPr>
+        <p:txBody>
+          <a:bodyPr anchor="ctr">
+            <a:normAutofit/>
+          </a:bodyPr>
+          <a:lstStyle/>
+          <a:p>
+            <a:pPr marL="0" indent="0" algn="ctr">
+              <a:buNone/>
+            </a:pPr>
+            <a:r>
+              <a:rPr lang="zh-TW" altLang="en-US" sz="6400" b="1" dirty="0" smtClean="0">
+                <a:solidFill>
+                  <a:srgbClr val="660033"/>
+                </a:solidFill>
+                <a:latin typeface="Microsoft JhengHei" panose="020B0604030504040204" pitchFamily="34" charset="-120"/>
+                <a:ea typeface="Microsoft JhengHei" panose="020B0604030504040204" pitchFamily="34" charset="-120"/>
+              </a:rPr>
+              <a:t>從</a:t>
+            </a:r>
+            <a:r>
+              <a:rPr lang="zh-TW" altLang="en-US" sz="6400" b="1" dirty="0">
+                <a:solidFill>
+                  <a:srgbClr val="660033"/>
+                </a:solidFill>
+                <a:latin typeface="Microsoft JhengHei" panose="020B0604030504040204" pitchFamily="34" charset="-120"/>
+                <a:ea typeface="Microsoft JhengHei" panose="020B0604030504040204" pitchFamily="34" charset="-120"/>
+              </a:rPr>
+              <a:t>今時直到</a:t>
+            </a:r>
+            <a:r>
+              <a:rPr lang="zh-TW" altLang="en-US" sz="6400" b="1" dirty="0" smtClean="0">
+                <a:solidFill>
+                  <a:srgbClr val="660033"/>
+                </a:solidFill>
+                <a:latin typeface="Microsoft JhengHei" panose="020B0604030504040204" pitchFamily="34" charset="-120"/>
+                <a:ea typeface="Microsoft JhengHei" panose="020B0604030504040204" pitchFamily="34" charset="-120"/>
+              </a:rPr>
+              <a:t>永遠 </a:t>
+            </a:r>
+            <a:r>
+              <a:rPr lang="en-US" altLang="zh-TW" sz="6400" b="1" dirty="0" err="1" smtClean="0">
+                <a:solidFill>
+                  <a:srgbClr val="660033"/>
+                </a:solidFill>
+                <a:latin typeface="Microsoft JhengHei" panose="020B0604030504040204" pitchFamily="34" charset="-120"/>
+                <a:ea typeface="Microsoft JhengHei" panose="020B0604030504040204" pitchFamily="34" charset="-120"/>
+              </a:rPr>
+              <a:t>x2</a:t>
+            </a:r>
+            <a:endParaRPr lang="vi-VN" sz="6400" b="1" dirty="0">
+              <a:solidFill>
+                <a:srgbClr val="660033"/>
+              </a:solidFill>
+              <a:latin typeface="Microsoft JhengHei" panose="020B0604030504040204" pitchFamily="34" charset="-120"/>
+              <a:ea typeface="Microsoft JhengHei" panose="020B0604030504040204" pitchFamily="34" charset="-120"/>
+            </a:endParaRPr>
+          </a:p>
+        </p:txBody>
+      </p:sp>
+      <p:sp>
+        <p:nvSpPr>
+          <p:cNvPr id="3" name="TextBox 2"/>
+          <p:cNvSpPr txBox="1"/>
+          <p:nvPr/>
+        </p:nvSpPr>
+        <p:spPr>
+          <a:xfrm>
+            <a:off x="178" y="5373218"/>
+            <a:ext cx="12191823" cy="769441"/>
+          </a:xfrm>
+          <a:prstGeom prst="rect">
+            <a:avLst/>
+          </a:prstGeom>
+          <a:noFill/>
+        </p:spPr>
+        <p:txBody>
+          <a:bodyPr wrap="square" rtlCol="0" anchor="ctr">
+            <a:spAutoFit/>
+          </a:bodyPr>
+          <a:lstStyle/>
+          <a:p>
+            <a:pPr algn="ctr"/>
+            <a:r>
+              <a:rPr lang="en-US" sz="4400" b="1" dirty="0">
+                <a:solidFill>
+                  <a:srgbClr val="660033"/>
+                </a:solidFill>
+                <a:effectLst/>
+                <a:latin typeface="Microsoft JhengHei" panose="020B0604030504040204" pitchFamily="34" charset="-120"/>
+                <a:ea typeface="Microsoft JhengHei" panose="020B0604030504040204" pitchFamily="34" charset="-120"/>
+              </a:rPr>
+              <a:t>( </a:t>
+            </a:r>
+            <a:r>
+              <a:rPr lang="zh-CN" altLang="en-US" sz="4400" b="1" dirty="0">
+                <a:solidFill>
+                  <a:srgbClr val="660033"/>
+                </a:solidFill>
+                <a:effectLst/>
+                <a:latin typeface="Microsoft JhengHei" panose="020B0604030504040204" pitchFamily="34" charset="-120"/>
+                <a:ea typeface="Microsoft JhengHei" panose="020B0604030504040204" pitchFamily="34" charset="-120"/>
+              </a:rPr>
+              <a:t>副</a:t>
+            </a:r>
+            <a:r>
+              <a:rPr lang="en-US" sz="4400" b="1" dirty="0">
+                <a:solidFill>
+                  <a:srgbClr val="660033"/>
+                </a:solidFill>
+                <a:effectLst/>
+                <a:latin typeface="Microsoft JhengHei" panose="020B0604030504040204" pitchFamily="34" charset="-120"/>
+                <a:ea typeface="Microsoft JhengHei" panose="020B0604030504040204" pitchFamily="34" charset="-120"/>
+              </a:rPr>
+              <a:t> )</a:t>
+            </a:r>
+            <a:endParaRPr lang="vi-VN" sz="4400" b="1" dirty="0">
+              <a:solidFill>
+                <a:srgbClr val="660033"/>
+              </a:solidFill>
+              <a:effectLst/>
+              <a:ea typeface="Microsoft JhengHei" panose="020B0604030504040204" pitchFamily="34" charset="-120"/>
+            </a:endParaRPr>
+          </a:p>
+        </p:txBody>
+      </p:sp>
+    </p:spTree>
+    <p:extLst>
+      <p:ext uri="{BB962C8B-B14F-4D97-AF65-F5344CB8AC3E}">
+        <p14:creationId xmlns:p14="http://schemas.microsoft.com/office/powerpoint/2010/main" xmlns="" val="254690880"/>
       </p:ext>
     </p:extLst>
   </p:cSld>
@@ -3554,7 +5542,7 @@
     </p:spTree>
     <p:extLst>
       <p:ext uri="{BB962C8B-B14F-4D97-AF65-F5344CB8AC3E}">
-        <p14:creationId xmlns:p14="http://schemas.microsoft.com/office/powerpoint/2010/main" val="2071030861"/>
+        <p14:creationId xmlns:p14="http://schemas.microsoft.com/office/powerpoint/2010/main" xmlns="" val="2071030861"/>
       </p:ext>
     </p:extLst>
   </p:cSld>
@@ -3702,18 +5690,7 @@
                 <a:latin typeface="Microsoft JhengHei" panose="020B0604030504040204" pitchFamily="34" charset="-120"/>
                 <a:ea typeface="Microsoft JhengHei" panose="020B0604030504040204" pitchFamily="34" charset="-120"/>
               </a:rPr>
-              <a:t> </a:t>
-            </a:r>
-            <a:r>
-              <a:rPr lang="en-US" sz="4400" b="1" dirty="0">
-                <a:solidFill>
-                  <a:srgbClr val="660033"/>
-                </a:solidFill>
-                <a:effectLst/>
-                <a:latin typeface="Microsoft JhengHei" panose="020B0604030504040204" pitchFamily="34" charset="-120"/>
-                <a:ea typeface="Microsoft JhengHei" panose="020B0604030504040204" pitchFamily="34" charset="-120"/>
-              </a:rPr>
-              <a:t>)</a:t>
+              <a:t> )</a:t>
             </a:r>
             <a:endParaRPr lang="vi-VN" sz="4400" b="1" dirty="0">
               <a:solidFill>
@@ -3728,7 +5705,7 @@
     </p:spTree>
     <p:extLst>
       <p:ext uri="{BB962C8B-B14F-4D97-AF65-F5344CB8AC3E}">
-        <p14:creationId xmlns:p14="http://schemas.microsoft.com/office/powerpoint/2010/main" val="3850034681"/>
+        <p14:creationId xmlns:p14="http://schemas.microsoft.com/office/powerpoint/2010/main" xmlns="" val="3850034681"/>
       </p:ext>
     </p:extLst>
   </p:cSld>
@@ -3876,18 +5853,7 @@
                 <a:latin typeface="Microsoft JhengHei" panose="020B0604030504040204" pitchFamily="34" charset="-120"/>
                 <a:ea typeface="Microsoft JhengHei" panose="020B0604030504040204" pitchFamily="34" charset="-120"/>
               </a:rPr>
-              <a:t> </a:t>
-            </a:r>
-            <a:r>
-              <a:rPr lang="en-US" sz="4400" b="1" dirty="0">
-                <a:solidFill>
-                  <a:srgbClr val="660033"/>
-                </a:solidFill>
-                <a:effectLst/>
-                <a:latin typeface="Microsoft JhengHei" panose="020B0604030504040204" pitchFamily="34" charset="-120"/>
-                <a:ea typeface="Microsoft JhengHei" panose="020B0604030504040204" pitchFamily="34" charset="-120"/>
-              </a:rPr>
-              <a:t>)</a:t>
+              <a:t> )</a:t>
             </a:r>
             <a:endParaRPr lang="vi-VN" sz="4400" b="1" dirty="0">
               <a:solidFill>
@@ -3902,7 +5868,698 @@
     </p:spTree>
     <p:extLst>
       <p:ext uri="{BB962C8B-B14F-4D97-AF65-F5344CB8AC3E}">
-        <p14:creationId xmlns:p14="http://schemas.microsoft.com/office/powerpoint/2010/main" val="254690880"/>
+        <p14:creationId xmlns:p14="http://schemas.microsoft.com/office/powerpoint/2010/main" xmlns="" val="254690880"/>
+      </p:ext>
+    </p:extLst>
+  </p:cSld>
+  <p:clrMapOvr>
+    <a:masterClrMapping/>
+  </p:clrMapOvr>
+</p:sld>
+</file>
+
+<file path=ppt/slides/slide6.xml><?xml version="1.0" encoding="utf-8"?>
+<p:sld xmlns:a="http://schemas.openxmlformats.org/drawingml/2006/main" xmlns:r="http://schemas.openxmlformats.org/officeDocument/2006/relationships" xmlns:p="http://schemas.openxmlformats.org/presentationml/2006/main">
+  <p:cSld>
+    <p:spTree>
+      <p:nvGrpSpPr>
+        <p:cNvPr id="1" name=""/>
+        <p:cNvGrpSpPr/>
+        <p:nvPr/>
+      </p:nvGrpSpPr>
+      <p:grpSpPr>
+        <a:xfrm>
+          <a:off x="0" y="0"/>
+          <a:ext cx="0" cy="0"/>
+          <a:chOff x="0" y="0"/>
+          <a:chExt cx="0" cy="0"/>
+        </a:xfrm>
+      </p:grpSpPr>
+      <p:sp>
+        <p:nvSpPr>
+          <p:cNvPr id="5" name="內容版面配置區 4"/>
+          <p:cNvSpPr>
+            <a:spLocks noGrp="1"/>
+          </p:cNvSpPr>
+          <p:nvPr>
+            <p:ph idx="1"/>
+          </p:nvPr>
+        </p:nvSpPr>
+        <p:spPr>
+          <a:xfrm>
+            <a:off x="0" y="2084851"/>
+            <a:ext cx="12192000" cy="2404863"/>
+          </a:xfrm>
+        </p:spPr>
+        <p:txBody>
+          <a:bodyPr anchor="ctr">
+            <a:normAutofit/>
+          </a:bodyPr>
+          <a:lstStyle/>
+          <a:p>
+            <a:pPr marL="0" indent="0" algn="ctr">
+              <a:buNone/>
+            </a:pPr>
+            <a:r>
+              <a:rPr lang="zh-TW" altLang="en-US" sz="6400" b="1" dirty="0">
+                <a:solidFill>
+                  <a:srgbClr val="660033"/>
+                </a:solidFill>
+                <a:latin typeface="Microsoft JhengHei" panose="020B0604030504040204" pitchFamily="34" charset="-120"/>
+                <a:ea typeface="Microsoft JhengHei" panose="020B0604030504040204" pitchFamily="34" charset="-120"/>
+              </a:rPr>
+              <a:t>信實的神</a:t>
+            </a:r>
+            <a:r>
+              <a:rPr lang="zh-CN" altLang="en-US" sz="6400" b="1" dirty="0">
+                <a:solidFill>
+                  <a:srgbClr val="660033"/>
+                </a:solidFill>
+                <a:latin typeface="Microsoft JhengHei" panose="020B0604030504040204" pitchFamily="34" charset="-120"/>
+                <a:ea typeface="Microsoft JhengHei" panose="020B0604030504040204" pitchFamily="34" charset="-120"/>
+              </a:rPr>
+              <a:t>袮</a:t>
+            </a:r>
+            <a:r>
+              <a:rPr lang="zh-TW" altLang="en-US" sz="6400" b="1" dirty="0">
+                <a:solidFill>
+                  <a:srgbClr val="660033"/>
+                </a:solidFill>
+                <a:latin typeface="Microsoft JhengHei" panose="020B0604030504040204" pitchFamily="34" charset="-120"/>
+                <a:ea typeface="Microsoft JhengHei" panose="020B0604030504040204" pitchFamily="34" charset="-120"/>
+              </a:rPr>
+              <a:t>永遠不改變</a:t>
+            </a:r>
+            <a:endParaRPr lang="en-US" altLang="zh-TW" sz="6400" b="1" dirty="0">
+              <a:solidFill>
+                <a:srgbClr val="660033"/>
+              </a:solidFill>
+              <a:latin typeface="Microsoft JhengHei" panose="020B0604030504040204" pitchFamily="34" charset="-120"/>
+              <a:ea typeface="Microsoft JhengHei" panose="020B0604030504040204" pitchFamily="34" charset="-120"/>
+            </a:endParaRPr>
+          </a:p>
+          <a:p>
+            <a:pPr marL="0" indent="0" algn="ctr">
+              <a:buNone/>
+            </a:pPr>
+            <a:r>
+              <a:rPr lang="zh-TW" altLang="en-US" sz="6400" b="1" dirty="0">
+                <a:solidFill>
+                  <a:srgbClr val="660033"/>
+                </a:solidFill>
+                <a:latin typeface="Microsoft JhengHei" panose="020B0604030504040204" pitchFamily="34" charset="-120"/>
+                <a:ea typeface="Microsoft JhengHei" panose="020B0604030504040204" pitchFamily="34" charset="-120"/>
+              </a:rPr>
+              <a:t>信實的神</a:t>
+            </a:r>
+            <a:r>
+              <a:rPr lang="zh-CN" altLang="en-US" sz="6400" b="1" dirty="0">
+                <a:solidFill>
+                  <a:srgbClr val="660033"/>
+                </a:solidFill>
+                <a:latin typeface="Microsoft JhengHei" panose="020B0604030504040204" pitchFamily="34" charset="-120"/>
+                <a:ea typeface="Microsoft JhengHei" panose="020B0604030504040204" pitchFamily="34" charset="-120"/>
+              </a:rPr>
+              <a:t>袮</a:t>
+            </a:r>
+            <a:r>
+              <a:rPr lang="zh-TW" altLang="en-US" sz="6400" b="1" dirty="0">
+                <a:solidFill>
+                  <a:srgbClr val="660033"/>
+                </a:solidFill>
+                <a:latin typeface="Microsoft JhengHei" panose="020B0604030504040204" pitchFamily="34" charset="-120"/>
+                <a:ea typeface="Microsoft JhengHei" panose="020B0604030504040204" pitchFamily="34" charset="-120"/>
+              </a:rPr>
+              <a:t>永遠不改變</a:t>
+            </a:r>
+            <a:endParaRPr lang="en-US" altLang="zh-TW" sz="6400" b="1" dirty="0">
+              <a:solidFill>
+                <a:srgbClr val="660033"/>
+              </a:solidFill>
+              <a:latin typeface="Microsoft JhengHei" panose="020B0604030504040204" pitchFamily="34" charset="-120"/>
+              <a:ea typeface="Microsoft JhengHei" panose="020B0604030504040204" pitchFamily="34" charset="-120"/>
+            </a:endParaRPr>
+          </a:p>
+        </p:txBody>
+      </p:sp>
+      <p:sp>
+        <p:nvSpPr>
+          <p:cNvPr id="3" name="TextBox 2"/>
+          <p:cNvSpPr txBox="1"/>
+          <p:nvPr/>
+        </p:nvSpPr>
+        <p:spPr>
+          <a:xfrm>
+            <a:off x="178" y="5373218"/>
+            <a:ext cx="12191823" cy="769441"/>
+          </a:xfrm>
+          <a:prstGeom prst="rect">
+            <a:avLst/>
+          </a:prstGeom>
+          <a:noFill/>
+        </p:spPr>
+        <p:txBody>
+          <a:bodyPr wrap="square" rtlCol="0" anchor="ctr">
+            <a:spAutoFit/>
+          </a:bodyPr>
+          <a:lstStyle/>
+          <a:p>
+            <a:pPr algn="ctr"/>
+            <a:r>
+              <a:rPr lang="en-US" sz="4400" b="1" dirty="0">
+                <a:solidFill>
+                  <a:srgbClr val="660033"/>
+                </a:solidFill>
+                <a:effectLst/>
+                <a:latin typeface="Microsoft JhengHei" panose="020B0604030504040204" pitchFamily="34" charset="-120"/>
+                <a:ea typeface="Microsoft JhengHei" panose="020B0604030504040204" pitchFamily="34" charset="-120"/>
+              </a:rPr>
+              <a:t>( </a:t>
+            </a:r>
+            <a:r>
+              <a:rPr lang="zh-CN" altLang="en-US" sz="4400" b="1" dirty="0">
+                <a:solidFill>
+                  <a:srgbClr val="660033"/>
+                </a:solidFill>
+                <a:effectLst/>
+                <a:latin typeface="Microsoft JhengHei" panose="020B0604030504040204" pitchFamily="34" charset="-120"/>
+                <a:ea typeface="Microsoft JhengHei" panose="020B0604030504040204" pitchFamily="34" charset="-120"/>
+              </a:rPr>
+              <a:t>正</a:t>
+            </a:r>
+            <a:r>
+              <a:rPr lang="en-US" sz="4400" b="1" dirty="0">
+                <a:solidFill>
+                  <a:srgbClr val="660033"/>
+                </a:solidFill>
+                <a:effectLst/>
+                <a:latin typeface="Microsoft JhengHei" panose="020B0604030504040204" pitchFamily="34" charset="-120"/>
+                <a:ea typeface="Microsoft JhengHei" panose="020B0604030504040204" pitchFamily="34" charset="-120"/>
+              </a:rPr>
+              <a:t> )</a:t>
+            </a:r>
+            <a:endParaRPr lang="vi-VN" sz="4400" b="1" dirty="0">
+              <a:solidFill>
+                <a:srgbClr val="660033"/>
+              </a:solidFill>
+              <a:effectLst/>
+              <a:ea typeface="Microsoft JhengHei" panose="020B0604030504040204" pitchFamily="34" charset="-120"/>
+            </a:endParaRPr>
+          </a:p>
+        </p:txBody>
+      </p:sp>
+    </p:spTree>
+    <p:extLst>
+      <p:ext uri="{BB962C8B-B14F-4D97-AF65-F5344CB8AC3E}">
+        <p14:creationId xmlns:p14="http://schemas.microsoft.com/office/powerpoint/2010/main" xmlns="" val="1872291190"/>
+      </p:ext>
+    </p:extLst>
+  </p:cSld>
+  <p:clrMapOvr>
+    <a:masterClrMapping/>
+  </p:clrMapOvr>
+</p:sld>
+</file>
+
+<file path=ppt/slides/slide7.xml><?xml version="1.0" encoding="utf-8"?>
+<p:sld xmlns:a="http://schemas.openxmlformats.org/drawingml/2006/main" xmlns:r="http://schemas.openxmlformats.org/officeDocument/2006/relationships" xmlns:p="http://schemas.openxmlformats.org/presentationml/2006/main">
+  <p:cSld>
+    <p:spTree>
+      <p:nvGrpSpPr>
+        <p:cNvPr id="1" name=""/>
+        <p:cNvGrpSpPr/>
+        <p:nvPr/>
+      </p:nvGrpSpPr>
+      <p:grpSpPr>
+        <a:xfrm>
+          <a:off x="0" y="0"/>
+          <a:ext cx="0" cy="0"/>
+          <a:chOff x="0" y="0"/>
+          <a:chExt cx="0" cy="0"/>
+        </a:xfrm>
+      </p:grpSpPr>
+      <p:sp>
+        <p:nvSpPr>
+          <p:cNvPr id="5" name="內容版面配置區 4"/>
+          <p:cNvSpPr>
+            <a:spLocks noGrp="1"/>
+          </p:cNvSpPr>
+          <p:nvPr>
+            <p:ph idx="1"/>
+          </p:nvPr>
+        </p:nvSpPr>
+        <p:spPr>
+          <a:xfrm>
+            <a:off x="0" y="2084851"/>
+            <a:ext cx="12192000" cy="2404863"/>
+          </a:xfrm>
+        </p:spPr>
+        <p:txBody>
+          <a:bodyPr anchor="ctr">
+            <a:normAutofit/>
+          </a:bodyPr>
+          <a:lstStyle/>
+          <a:p>
+            <a:pPr marL="0" indent="0" algn="ctr">
+              <a:buNone/>
+            </a:pPr>
+            <a:r>
+              <a:rPr lang="zh-TW" altLang="en-US" sz="6400" b="1" dirty="0">
+                <a:solidFill>
+                  <a:srgbClr val="660033"/>
+                </a:solidFill>
+                <a:latin typeface="Microsoft JhengHei" panose="020B0604030504040204" pitchFamily="34" charset="-120"/>
+                <a:ea typeface="Microsoft JhengHei" panose="020B0604030504040204" pitchFamily="34" charset="-120"/>
+              </a:rPr>
+              <a:t>依靠耶和華的人好像錫安山</a:t>
+            </a:r>
+            <a:endParaRPr lang="en-US" altLang="zh-TW" sz="6400" b="1" dirty="0">
+              <a:solidFill>
+                <a:srgbClr val="660033"/>
+              </a:solidFill>
+              <a:latin typeface="Microsoft JhengHei" panose="020B0604030504040204" pitchFamily="34" charset="-120"/>
+              <a:ea typeface="Microsoft JhengHei" panose="020B0604030504040204" pitchFamily="34" charset="-120"/>
+            </a:endParaRPr>
+          </a:p>
+          <a:p>
+            <a:pPr marL="0" indent="0" algn="ctr">
+              <a:buNone/>
+            </a:pPr>
+            <a:r>
+              <a:rPr lang="zh-TW" altLang="en-US" sz="6400" b="1" dirty="0">
+                <a:solidFill>
+                  <a:srgbClr val="660033"/>
+                </a:solidFill>
+                <a:latin typeface="Microsoft JhengHei" panose="020B0604030504040204" pitchFamily="34" charset="-120"/>
+                <a:ea typeface="Microsoft JhengHei" panose="020B0604030504040204" pitchFamily="34" charset="-120"/>
+              </a:rPr>
+              <a:t>哈利路亞  永不動搖</a:t>
+            </a:r>
+            <a:endParaRPr lang="vi-VN" sz="6400" b="1" dirty="0">
+              <a:solidFill>
+                <a:srgbClr val="660033"/>
+              </a:solidFill>
+              <a:ea typeface="Microsoft JhengHei" panose="020B0604030504040204" pitchFamily="34" charset="-120"/>
+            </a:endParaRPr>
+          </a:p>
+        </p:txBody>
+      </p:sp>
+      <p:sp>
+        <p:nvSpPr>
+          <p:cNvPr id="3" name="TextBox 2"/>
+          <p:cNvSpPr txBox="1"/>
+          <p:nvPr/>
+        </p:nvSpPr>
+        <p:spPr>
+          <a:xfrm>
+            <a:off x="178" y="5373218"/>
+            <a:ext cx="12191823" cy="769441"/>
+          </a:xfrm>
+          <a:prstGeom prst="rect">
+            <a:avLst/>
+          </a:prstGeom>
+          <a:noFill/>
+        </p:spPr>
+        <p:txBody>
+          <a:bodyPr wrap="square" rtlCol="0" anchor="ctr">
+            <a:spAutoFit/>
+          </a:bodyPr>
+          <a:lstStyle/>
+          <a:p>
+            <a:pPr algn="ctr"/>
+            <a:r>
+              <a:rPr lang="en-US" sz="4400" b="1" dirty="0">
+                <a:solidFill>
+                  <a:srgbClr val="660033"/>
+                </a:solidFill>
+                <a:effectLst/>
+                <a:latin typeface="Microsoft JhengHei" panose="020B0604030504040204" pitchFamily="34" charset="-120"/>
+                <a:ea typeface="Microsoft JhengHei" panose="020B0604030504040204" pitchFamily="34" charset="-120"/>
+              </a:rPr>
+              <a:t>( </a:t>
+            </a:r>
+            <a:r>
+              <a:rPr lang="zh-CN" altLang="en-US" sz="4400" b="1" dirty="0">
+                <a:solidFill>
+                  <a:srgbClr val="660033"/>
+                </a:solidFill>
+                <a:effectLst/>
+                <a:latin typeface="Microsoft JhengHei" panose="020B0604030504040204" pitchFamily="34" charset="-120"/>
+                <a:ea typeface="Microsoft JhengHei" panose="020B0604030504040204" pitchFamily="34" charset="-120"/>
+              </a:rPr>
+              <a:t>正</a:t>
+            </a:r>
+            <a:r>
+              <a:rPr lang="en-US" sz="4400" b="1" dirty="0">
+                <a:solidFill>
+                  <a:srgbClr val="660033"/>
+                </a:solidFill>
+                <a:effectLst/>
+                <a:latin typeface="Microsoft JhengHei" panose="020B0604030504040204" pitchFamily="34" charset="-120"/>
+                <a:ea typeface="Microsoft JhengHei" panose="020B0604030504040204" pitchFamily="34" charset="-120"/>
+              </a:rPr>
+              <a:t> )</a:t>
+            </a:r>
+            <a:endParaRPr lang="vi-VN" sz="4400" b="1" dirty="0">
+              <a:solidFill>
+                <a:srgbClr val="660033"/>
+              </a:solidFill>
+              <a:effectLst/>
+              <a:ea typeface="Microsoft JhengHei" panose="020B0604030504040204" pitchFamily="34" charset="-120"/>
+            </a:endParaRPr>
+          </a:p>
+        </p:txBody>
+      </p:sp>
+    </p:spTree>
+    <p:extLst>
+      <p:ext uri="{BB962C8B-B14F-4D97-AF65-F5344CB8AC3E}">
+        <p14:creationId xmlns:p14="http://schemas.microsoft.com/office/powerpoint/2010/main" xmlns="" val="2071030861"/>
+      </p:ext>
+    </p:extLst>
+  </p:cSld>
+  <p:clrMapOvr>
+    <a:masterClrMapping/>
+  </p:clrMapOvr>
+</p:sld>
+</file>
+
+<file path=ppt/slides/slide8.xml><?xml version="1.0" encoding="utf-8"?>
+<p:sld xmlns:a="http://schemas.openxmlformats.org/drawingml/2006/main" xmlns:r="http://schemas.openxmlformats.org/officeDocument/2006/relationships" xmlns:p="http://schemas.openxmlformats.org/presentationml/2006/main">
+  <p:cSld>
+    <p:spTree>
+      <p:nvGrpSpPr>
+        <p:cNvPr id="1" name=""/>
+        <p:cNvGrpSpPr/>
+        <p:nvPr/>
+      </p:nvGrpSpPr>
+      <p:grpSpPr>
+        <a:xfrm>
+          <a:off x="0" y="0"/>
+          <a:ext cx="0" cy="0"/>
+          <a:chOff x="0" y="0"/>
+          <a:chExt cx="0" cy="0"/>
+        </a:xfrm>
+      </p:grpSpPr>
+      <p:sp>
+        <p:nvSpPr>
+          <p:cNvPr id="5" name="內容版面配置區 4"/>
+          <p:cNvSpPr>
+            <a:spLocks noGrp="1"/>
+          </p:cNvSpPr>
+          <p:nvPr>
+            <p:ph idx="1"/>
+          </p:nvPr>
+        </p:nvSpPr>
+        <p:spPr>
+          <a:xfrm>
+            <a:off x="0" y="2084851"/>
+            <a:ext cx="12192000" cy="2404863"/>
+          </a:xfrm>
+        </p:spPr>
+        <p:txBody>
+          <a:bodyPr anchor="ctr">
+            <a:normAutofit/>
+          </a:bodyPr>
+          <a:lstStyle/>
+          <a:p>
+            <a:pPr marL="0" indent="0" algn="ctr">
+              <a:buNone/>
+            </a:pPr>
+            <a:r>
+              <a:rPr lang="zh-TW" altLang="en-US" sz="6400" b="1" dirty="0">
+                <a:solidFill>
+                  <a:srgbClr val="660033"/>
+                </a:solidFill>
+                <a:latin typeface="Microsoft JhengHei" panose="020B0604030504040204" pitchFamily="34" charset="-120"/>
+                <a:ea typeface="Microsoft JhengHei" panose="020B0604030504040204" pitchFamily="34" charset="-120"/>
+              </a:rPr>
+              <a:t>祂的應許永不改變不落空</a:t>
+            </a:r>
+            <a:endParaRPr lang="en-US" altLang="zh-TW" sz="6400" b="1" dirty="0">
+              <a:solidFill>
+                <a:srgbClr val="660033"/>
+              </a:solidFill>
+              <a:latin typeface="Microsoft JhengHei" panose="020B0604030504040204" pitchFamily="34" charset="-120"/>
+              <a:ea typeface="Microsoft JhengHei" panose="020B0604030504040204" pitchFamily="34" charset="-120"/>
+            </a:endParaRPr>
+          </a:p>
+          <a:p>
+            <a:pPr marL="0" indent="0" algn="ctr">
+              <a:buNone/>
+            </a:pPr>
+            <a:r>
+              <a:rPr lang="zh-TW" altLang="en-US" sz="6400" b="1" dirty="0">
+                <a:solidFill>
+                  <a:srgbClr val="660033"/>
+                </a:solidFill>
+                <a:latin typeface="Microsoft JhengHei" panose="020B0604030504040204" pitchFamily="34" charset="-120"/>
+                <a:ea typeface="Microsoft JhengHei" panose="020B0604030504040204" pitchFamily="34" charset="-120"/>
+              </a:rPr>
+              <a:t>眾山怎樣圍繞耶路撒冷</a:t>
+            </a:r>
+            <a:endParaRPr lang="en-US" altLang="zh-TW" sz="6400" b="1" dirty="0">
+              <a:solidFill>
+                <a:srgbClr val="660033"/>
+              </a:solidFill>
+              <a:latin typeface="Microsoft JhengHei" panose="020B0604030504040204" pitchFamily="34" charset="-120"/>
+              <a:ea typeface="Microsoft JhengHei" panose="020B0604030504040204" pitchFamily="34" charset="-120"/>
+            </a:endParaRPr>
+          </a:p>
+        </p:txBody>
+      </p:sp>
+      <p:sp>
+        <p:nvSpPr>
+          <p:cNvPr id="3" name="TextBox 2"/>
+          <p:cNvSpPr txBox="1"/>
+          <p:nvPr/>
+        </p:nvSpPr>
+        <p:spPr>
+          <a:xfrm>
+            <a:off x="178" y="5373218"/>
+            <a:ext cx="12191823" cy="769441"/>
+          </a:xfrm>
+          <a:prstGeom prst="rect">
+            <a:avLst/>
+          </a:prstGeom>
+          <a:noFill/>
+        </p:spPr>
+        <p:txBody>
+          <a:bodyPr wrap="square" rtlCol="0" anchor="ctr">
+            <a:spAutoFit/>
+          </a:bodyPr>
+          <a:lstStyle/>
+          <a:p>
+            <a:pPr algn="ctr"/>
+            <a:r>
+              <a:rPr lang="en-US" sz="4400" b="1" dirty="0">
+                <a:solidFill>
+                  <a:srgbClr val="660033"/>
+                </a:solidFill>
+                <a:effectLst/>
+                <a:latin typeface="Microsoft JhengHei" panose="020B0604030504040204" pitchFamily="34" charset="-120"/>
+                <a:ea typeface="Microsoft JhengHei" panose="020B0604030504040204" pitchFamily="34" charset="-120"/>
+              </a:rPr>
+              <a:t>( </a:t>
+            </a:r>
+            <a:r>
+              <a:rPr lang="zh-CN" altLang="en-US" sz="4400" b="1" dirty="0">
+                <a:solidFill>
+                  <a:srgbClr val="660033"/>
+                </a:solidFill>
+                <a:effectLst/>
+                <a:latin typeface="Microsoft JhengHei" panose="020B0604030504040204" pitchFamily="34" charset="-120"/>
+                <a:ea typeface="Microsoft JhengHei" panose="020B0604030504040204" pitchFamily="34" charset="-120"/>
+              </a:rPr>
+              <a:t>副</a:t>
+            </a:r>
+            <a:r>
+              <a:rPr lang="en-US" sz="4400" b="1" dirty="0">
+                <a:solidFill>
+                  <a:srgbClr val="660033"/>
+                </a:solidFill>
+                <a:effectLst/>
+                <a:latin typeface="Microsoft JhengHei" panose="020B0604030504040204" pitchFamily="34" charset="-120"/>
+                <a:ea typeface="Microsoft JhengHei" panose="020B0604030504040204" pitchFamily="34" charset="-120"/>
+              </a:rPr>
+              <a:t> )</a:t>
+            </a:r>
+            <a:endParaRPr lang="vi-VN" sz="4400" b="1" dirty="0">
+              <a:solidFill>
+                <a:srgbClr val="660033"/>
+              </a:solidFill>
+              <a:effectLst/>
+              <a:ea typeface="Microsoft JhengHei" panose="020B0604030504040204" pitchFamily="34" charset="-120"/>
+            </a:endParaRPr>
+          </a:p>
+        </p:txBody>
+      </p:sp>
+    </p:spTree>
+    <p:extLst>
+      <p:ext uri="{BB962C8B-B14F-4D97-AF65-F5344CB8AC3E}">
+        <p14:creationId xmlns:p14="http://schemas.microsoft.com/office/powerpoint/2010/main" xmlns="" val="3850034681"/>
+      </p:ext>
+    </p:extLst>
+  </p:cSld>
+  <p:clrMapOvr>
+    <a:masterClrMapping/>
+  </p:clrMapOvr>
+</p:sld>
+</file>
+
+<file path=ppt/slides/slide9.xml><?xml version="1.0" encoding="utf-8"?>
+<p:sld xmlns:a="http://schemas.openxmlformats.org/drawingml/2006/main" xmlns:r="http://schemas.openxmlformats.org/officeDocument/2006/relationships" xmlns:p="http://schemas.openxmlformats.org/presentationml/2006/main">
+  <p:cSld>
+    <p:spTree>
+      <p:nvGrpSpPr>
+        <p:cNvPr id="1" name=""/>
+        <p:cNvGrpSpPr/>
+        <p:nvPr/>
+      </p:nvGrpSpPr>
+      <p:grpSpPr>
+        <a:xfrm>
+          <a:off x="0" y="0"/>
+          <a:ext cx="0" cy="0"/>
+          <a:chOff x="0" y="0"/>
+          <a:chExt cx="0" cy="0"/>
+        </a:xfrm>
+      </p:grpSpPr>
+      <p:sp>
+        <p:nvSpPr>
+          <p:cNvPr id="5" name="內容版面配置區 4"/>
+          <p:cNvSpPr>
+            <a:spLocks noGrp="1"/>
+          </p:cNvSpPr>
+          <p:nvPr>
+            <p:ph idx="1"/>
+          </p:nvPr>
+        </p:nvSpPr>
+        <p:spPr>
+          <a:xfrm>
+            <a:off x="0" y="2084851"/>
+            <a:ext cx="12192000" cy="2404863"/>
+          </a:xfrm>
+        </p:spPr>
+        <p:txBody>
+          <a:bodyPr anchor="ctr">
+            <a:normAutofit/>
+          </a:bodyPr>
+          <a:lstStyle/>
+          <a:p>
+            <a:pPr marL="0" indent="0" algn="ctr">
+              <a:buNone/>
+            </a:pPr>
+            <a:r>
+              <a:rPr lang="zh-TW" altLang="en-US" sz="6400" b="1" dirty="0">
+                <a:solidFill>
+                  <a:srgbClr val="660033"/>
+                </a:solidFill>
+                <a:latin typeface="Microsoft JhengHei" panose="020B0604030504040204" pitchFamily="34" charset="-120"/>
+                <a:ea typeface="Microsoft JhengHei" panose="020B0604030504040204" pitchFamily="34" charset="-120"/>
+              </a:rPr>
+              <a:t>耶和華也照樣圍繞我們</a:t>
+            </a:r>
+            <a:endParaRPr lang="en-US" altLang="zh-TW" sz="6400" b="1" dirty="0">
+              <a:solidFill>
+                <a:srgbClr val="660033"/>
+              </a:solidFill>
+              <a:latin typeface="Microsoft JhengHei" panose="020B0604030504040204" pitchFamily="34" charset="-120"/>
+              <a:ea typeface="Microsoft JhengHei" panose="020B0604030504040204" pitchFamily="34" charset="-120"/>
+            </a:endParaRPr>
+          </a:p>
+          <a:p>
+            <a:pPr marL="0" indent="0" algn="ctr">
+              <a:buNone/>
+            </a:pPr>
+            <a:r>
+              <a:rPr lang="zh-TW" altLang="en-US" sz="6400" b="1" dirty="0">
+                <a:solidFill>
+                  <a:srgbClr val="660033"/>
+                </a:solidFill>
+                <a:latin typeface="Microsoft JhengHei" panose="020B0604030504040204" pitchFamily="34" charset="-120"/>
+                <a:ea typeface="Microsoft JhengHei" panose="020B0604030504040204" pitchFamily="34" charset="-120"/>
+              </a:rPr>
+              <a:t>從今時直到永遠</a:t>
+            </a:r>
+            <a:endParaRPr lang="vi-VN" sz="6400" b="1" dirty="0">
+              <a:solidFill>
+                <a:srgbClr val="660033"/>
+              </a:solidFill>
+              <a:latin typeface="Microsoft JhengHei" panose="020B0604030504040204" pitchFamily="34" charset="-120"/>
+              <a:ea typeface="Microsoft JhengHei" panose="020B0604030504040204" pitchFamily="34" charset="-120"/>
+            </a:endParaRPr>
+          </a:p>
+        </p:txBody>
+      </p:sp>
+      <p:sp>
+        <p:nvSpPr>
+          <p:cNvPr id="3" name="TextBox 2"/>
+          <p:cNvSpPr txBox="1"/>
+          <p:nvPr/>
+        </p:nvSpPr>
+        <p:spPr>
+          <a:xfrm>
+            <a:off x="178" y="5373218"/>
+            <a:ext cx="12191823" cy="769441"/>
+          </a:xfrm>
+          <a:prstGeom prst="rect">
+            <a:avLst/>
+          </a:prstGeom>
+          <a:noFill/>
+        </p:spPr>
+        <p:txBody>
+          <a:bodyPr wrap="square" rtlCol="0" anchor="ctr">
+            <a:spAutoFit/>
+          </a:bodyPr>
+          <a:lstStyle/>
+          <a:p>
+            <a:pPr algn="ctr"/>
+            <a:r>
+              <a:rPr lang="en-US" sz="4400" b="1" dirty="0">
+                <a:solidFill>
+                  <a:srgbClr val="660033"/>
+                </a:solidFill>
+                <a:effectLst/>
+                <a:latin typeface="Microsoft JhengHei" panose="020B0604030504040204" pitchFamily="34" charset="-120"/>
+                <a:ea typeface="Microsoft JhengHei" panose="020B0604030504040204" pitchFamily="34" charset="-120"/>
+              </a:rPr>
+              <a:t>( </a:t>
+            </a:r>
+            <a:r>
+              <a:rPr lang="zh-CN" altLang="en-US" sz="4400" b="1" dirty="0">
+                <a:solidFill>
+                  <a:srgbClr val="660033"/>
+                </a:solidFill>
+                <a:effectLst/>
+                <a:latin typeface="Microsoft JhengHei" panose="020B0604030504040204" pitchFamily="34" charset="-120"/>
+                <a:ea typeface="Microsoft JhengHei" panose="020B0604030504040204" pitchFamily="34" charset="-120"/>
+              </a:rPr>
+              <a:t>副</a:t>
+            </a:r>
+            <a:r>
+              <a:rPr lang="en-US" sz="4400" b="1" dirty="0">
+                <a:solidFill>
+                  <a:srgbClr val="660033"/>
+                </a:solidFill>
+                <a:effectLst/>
+                <a:latin typeface="Microsoft JhengHei" panose="020B0604030504040204" pitchFamily="34" charset="-120"/>
+                <a:ea typeface="Microsoft JhengHei" panose="020B0604030504040204" pitchFamily="34" charset="-120"/>
+              </a:rPr>
+              <a:t> )</a:t>
+            </a:r>
+            <a:endParaRPr lang="vi-VN" sz="4400" b="1" dirty="0">
+              <a:solidFill>
+                <a:srgbClr val="660033"/>
+              </a:solidFill>
+              <a:effectLst/>
+              <a:ea typeface="Microsoft JhengHei" panose="020B0604030504040204" pitchFamily="34" charset="-120"/>
+            </a:endParaRPr>
+          </a:p>
+        </p:txBody>
+      </p:sp>
+    </p:spTree>
+    <p:extLst>
+      <p:ext uri="{BB962C8B-B14F-4D97-AF65-F5344CB8AC3E}">
+        <p14:creationId xmlns:p14="http://schemas.microsoft.com/office/powerpoint/2010/main" xmlns="" val="254690880"/>
       </p:ext>
     </p:extLst>
   </p:cSld>
@@ -4194,7 +6851,7 @@
   <a:extraClrSchemeLst/>
   <a:extLst>
     <a:ext uri="{05A4C25C-085E-4340-85A3-A5531E510DB2}">
-      <thm15:themeFamily xmlns:thm15="http://schemas.microsoft.com/office/thememl/2012/main" name="Theme1" id="{AFC7C034-021A-479F-A5B0-F4AE2AC2A6F8}" vid="{E4B01A5C-7C0B-4AB8-8973-047186F18E30}"/>
+      <thm15:themeFamily xmlns:thm15="http://schemas.microsoft.com/office/thememl/2012/main" xmlns="" name="Theme1" id="{AFC7C034-021A-479F-A5B0-F4AE2AC2A6F8}" vid="{E4B01A5C-7C0B-4AB8-8973-047186F18E30}"/>
     </a:ext>
   </a:extLst>
 </a:theme>
